--- a/Tutorium Mathe/Tutorium5_Slides.pptx
+++ b/Tutorium Mathe/Tutorium5_Slides.pptx
@@ -5,23 +5,21 @@
     <p:sldMasterId id="2147483728" r:id="rId2"/>
   </p:sldMasterIdLst>
   <p:notesMasterIdLst>
-    <p:notesMasterId r:id="rId14"/>
+    <p:notesMasterId r:id="rId12"/>
   </p:notesMasterIdLst>
   <p:handoutMasterIdLst>
-    <p:handoutMasterId r:id="rId15"/>
+    <p:handoutMasterId r:id="rId13"/>
   </p:handoutMasterIdLst>
   <p:sldIdLst>
     <p:sldId id="256" r:id="rId3"/>
     <p:sldId id="257" r:id="rId4"/>
     <p:sldId id="258" r:id="rId5"/>
-    <p:sldId id="262" r:id="rId6"/>
+    <p:sldId id="259" r:id="rId6"/>
     <p:sldId id="260" r:id="rId7"/>
-    <p:sldId id="259" r:id="rId8"/>
-    <p:sldId id="261" r:id="rId9"/>
+    <p:sldId id="261" r:id="rId8"/>
+    <p:sldId id="262" r:id="rId9"/>
     <p:sldId id="263" r:id="rId10"/>
     <p:sldId id="264" r:id="rId11"/>
-    <p:sldId id="265" r:id="rId12"/>
-    <p:sldId id="266" r:id="rId13"/>
   </p:sldIdLst>
   <p:sldSz cx="12192000" cy="6858000"/>
   <p:notesSz cx="6858000" cy="9144000"/>
@@ -225,7 +223,7 @@
           <a:p>
             <a:fld id="{B535FBCA-7827-204B-8916-3BD441F72BB8}" type="datetimeFigureOut">
               <a:rPr lang="de-DE" smtClean="0"/>
-              <a:t>25.11.24</a:t>
+              <a:t>28.11.24</a:t>
             </a:fld>
             <a:endParaRPr lang="de-DE"/>
           </a:p>
@@ -418,7 +416,7 @@
           <a:p>
             <a:fld id="{842CE5A1-857B-214D-8BEE-AF65CEFCD544}" type="datetimeFigureOut">
               <a:rPr lang="de-DE" smtClean="0"/>
-              <a:t>25.11.24</a:t>
+              <a:t>28.11.24</a:t>
             </a:fld>
             <a:endParaRPr lang="de-DE"/>
           </a:p>
@@ -4259,80 +4257,21 @@
           <a:chExt cx="0" cy="0"/>
         </a:xfrm>
       </p:grpSpPr>
-      <p:sp>
-        <p:nvSpPr>
-          <p:cNvPr id="2" name="Inhaltsplatzhalter 1">
-            <a:extLst>
-              <a:ext uri="{FF2B5EF4-FFF2-40B4-BE49-F238E27FC236}">
-                <a16:creationId xmlns:a16="http://schemas.microsoft.com/office/drawing/2014/main" id="{F509F6A7-2ACA-9BDE-CC92-24E959ED38C6}"/>
-              </a:ext>
-            </a:extLst>
-          </p:cNvPr>
-          <p:cNvSpPr>
-            <a:spLocks noGrp="1"/>
-          </p:cNvSpPr>
-          <p:nvPr>
-            <p:ph idx="1"/>
-          </p:nvPr>
-        </p:nvSpPr>
-        <p:spPr/>
-        <p:txBody>
-          <a:bodyPr/>
-          <a:lstStyle/>
-          <a:p>
-            <a:r>
-              <a:rPr lang="de-DE" dirty="0"/>
-              <a:t>Sei K ein Körper. Ein lineares Gleichungssystem ist ein Objekt der folgenden Form</a:t>
-            </a:r>
-          </a:p>
-        </p:txBody>
-      </p:sp>
-      <p:sp>
-        <p:nvSpPr>
-          <p:cNvPr id="3" name="Titel 2">
-            <a:extLst>
-              <a:ext uri="{FF2B5EF4-FFF2-40B4-BE49-F238E27FC236}">
-                <a16:creationId xmlns:a16="http://schemas.microsoft.com/office/drawing/2014/main" id="{0A36BDE2-F218-6177-8296-2A82BA6C58F5}"/>
-              </a:ext>
-            </a:extLst>
-          </p:cNvPr>
-          <p:cNvSpPr>
-            <a:spLocks noGrp="1"/>
-          </p:cNvSpPr>
-          <p:nvPr>
-            <p:ph type="title"/>
-          </p:nvPr>
-        </p:nvSpPr>
-        <p:spPr/>
-        <p:txBody>
-          <a:bodyPr/>
-          <a:lstStyle/>
-          <a:p>
-            <a:r>
-              <a:rPr lang="de-DE" dirty="0"/>
-              <a:t>Wiederholung Lineare </a:t>
-            </a:r>
-            <a:r>
-              <a:rPr lang="de-DE" dirty="0" err="1"/>
-              <a:t>Gleichungsysteme</a:t>
-            </a:r>
-            <a:endParaRPr lang="de-DE" dirty="0"/>
-          </a:p>
-        </p:txBody>
-      </p:sp>
       <p:pic>
         <p:nvPicPr>
-          <p:cNvPr id="4" name="Grafik 3">
-            <a:extLst>
-              <a:ext uri="{FF2B5EF4-FFF2-40B4-BE49-F238E27FC236}">
-                <a16:creationId xmlns:a16="http://schemas.microsoft.com/office/drawing/2014/main" id="{E415F158-B333-37C5-1200-8499B2B9F5D4}"/>
+          <p:cNvPr id="4" name="Inhaltsplatzhalter 3">
+            <a:extLst>
+              <a:ext uri="{FF2B5EF4-FFF2-40B4-BE49-F238E27FC236}">
+                <a16:creationId xmlns:a16="http://schemas.microsoft.com/office/drawing/2014/main" id="{CBB23126-1C1D-A405-2A0B-93F39418A327}"/>
               </a:ext>
             </a:extLst>
           </p:cNvPr>
           <p:cNvPicPr>
-            <a:picLocks noChangeAspect="1"/>
+            <a:picLocks noGrp="1" noChangeAspect="1"/>
           </p:cNvPicPr>
-          <p:nvPr/>
+          <p:nvPr>
+            <p:ph idx="1"/>
+          </p:nvPr>
         </p:nvPicPr>
         <p:blipFill>
           <a:blip r:embed="rId2"/>
@@ -4342,279 +4281,20 @@
         </p:blipFill>
         <p:spPr>
           <a:xfrm>
-            <a:off x="1236965" y="1588148"/>
-            <a:ext cx="3656311" cy="2230090"/>
+            <a:off x="767408" y="1139181"/>
+            <a:ext cx="2819400" cy="1117600"/>
           </a:xfrm>
           <a:prstGeom prst="rect">
             <a:avLst/>
           </a:prstGeom>
         </p:spPr>
       </p:pic>
-      <mc:AlternateContent xmlns:mc="http://schemas.openxmlformats.org/markup-compatibility/2006">
-        <mc:Choice xmlns:a14="http://schemas.microsoft.com/office/drawing/2010/main" Requires="a14">
-          <p:sp>
-            <p:nvSpPr>
-              <p:cNvPr id="5" name="Textfeld 4">
-                <a:extLst>
-                  <a:ext uri="{FF2B5EF4-FFF2-40B4-BE49-F238E27FC236}">
-                    <a16:creationId xmlns:a16="http://schemas.microsoft.com/office/drawing/2014/main" id="{FCD08D45-4031-F638-446D-37BC3468E4C4}"/>
-                  </a:ext>
-                </a:extLst>
-              </p:cNvPr>
-              <p:cNvSpPr txBox="1"/>
-              <p:nvPr/>
-            </p:nvSpPr>
-            <p:spPr>
-              <a:xfrm>
-                <a:off x="5511114" y="1692876"/>
-                <a:ext cx="5076646" cy="945643"/>
-              </a:xfrm>
-              <a:prstGeom prst="rect">
-                <a:avLst/>
-              </a:prstGeom>
-              <a:noFill/>
-            </p:spPr>
-            <p:txBody>
-              <a:bodyPr wrap="none" rtlCol="0">
-                <a:spAutoFit/>
-              </a:bodyPr>
-              <a:lstStyle/>
-              <a:p>
-                <a14:m>
-                  <m:oMath xmlns:m="http://schemas.openxmlformats.org/officeDocument/2006/math">
-                    <m:sSub>
-                      <m:sSubPr>
-                        <m:ctrlPr>
-                          <a:rPr lang="de-AT" b="0" i="1" smtClean="0">
-                            <a:latin typeface="Cambria Math" panose="02040503050406030204" pitchFamily="18" charset="0"/>
-                          </a:rPr>
-                        </m:ctrlPr>
-                      </m:sSubPr>
-                      <m:e>
-                        <m:r>
-                          <a:rPr lang="de-AT" b="0" i="1" smtClean="0">
-                            <a:latin typeface="Cambria Math" panose="02040503050406030204" pitchFamily="18" charset="0"/>
-                          </a:rPr>
-                          <m:t>𝑎</m:t>
-                        </m:r>
-                      </m:e>
-                      <m:sub>
-                        <m:r>
-                          <a:rPr lang="de-AT" b="0" i="1" smtClean="0">
-                            <a:latin typeface="Cambria Math" panose="02040503050406030204" pitchFamily="18" charset="0"/>
-                          </a:rPr>
-                          <m:t>𝑖𝑗</m:t>
-                        </m:r>
-                      </m:sub>
-                    </m:sSub>
-                    <m:r>
-                      <a:rPr lang="de-AT" b="0" i="1" smtClean="0">
-                        <a:latin typeface="Cambria Math" panose="02040503050406030204" pitchFamily="18" charset="0"/>
-                      </a:rPr>
-                      <m:t>∈</m:t>
-                    </m:r>
-                    <m:r>
-                      <a:rPr lang="de-AT" b="0" i="1" smtClean="0">
-                        <a:latin typeface="Cambria Math" panose="02040503050406030204" pitchFamily="18" charset="0"/>
-                      </a:rPr>
-                      <m:t>𝐾</m:t>
-                    </m:r>
-                    <m:r>
-                      <a:rPr lang="de-AT" b="0" i="0" smtClean="0">
-                        <a:latin typeface="Cambria Math" panose="02040503050406030204" pitchFamily="18" charset="0"/>
-                      </a:rPr>
-                      <m:t>,</m:t>
-                    </m:r>
-                    <m:sSub>
-                      <m:sSubPr>
-                        <m:ctrlPr>
-                          <a:rPr lang="de-AT" b="0" i="0" smtClean="0">
-                            <a:latin typeface="Cambria Math" panose="02040503050406030204" pitchFamily="18" charset="0"/>
-                          </a:rPr>
-                        </m:ctrlPr>
-                      </m:sSubPr>
-                      <m:e>
-                        <m:r>
-                          <m:rPr>
-                            <m:sty m:val="p"/>
-                          </m:rPr>
-                          <a:rPr lang="de-AT" b="0" i="0" smtClean="0">
-                            <a:latin typeface="Cambria Math" panose="02040503050406030204" pitchFamily="18" charset="0"/>
-                          </a:rPr>
-                          <m:t>b</m:t>
-                        </m:r>
-                      </m:e>
-                      <m:sub>
-                        <m:r>
-                          <m:rPr>
-                            <m:sty m:val="p"/>
-                          </m:rPr>
-                          <a:rPr lang="de-AT" b="0" i="0" smtClean="0">
-                            <a:latin typeface="Cambria Math" panose="02040503050406030204" pitchFamily="18" charset="0"/>
-                          </a:rPr>
-                          <m:t>i</m:t>
-                        </m:r>
-                      </m:sub>
-                    </m:sSub>
-                    <m:r>
-                      <a:rPr lang="de-AT" b="0" i="1" smtClean="0">
-                        <a:latin typeface="Cambria Math" panose="02040503050406030204" pitchFamily="18" charset="0"/>
-                      </a:rPr>
-                      <m:t>∈</m:t>
-                    </m:r>
-                    <m:r>
-                      <a:rPr lang="de-AT" b="0" i="1" smtClean="0">
-                        <a:latin typeface="Cambria Math" panose="02040503050406030204" pitchFamily="18" charset="0"/>
-                      </a:rPr>
-                      <m:t>𝐾</m:t>
-                    </m:r>
-                  </m:oMath>
-                </a14:m>
-                <a:r>
-                  <a:rPr lang="de-DE" dirty="0"/>
-                  <a:t>, </a:t>
-                </a:r>
-                <a14:m>
-                  <m:oMath xmlns:m="http://schemas.openxmlformats.org/officeDocument/2006/math">
-                    <m:r>
-                      <a:rPr lang="de-AT" b="0" i="1" smtClean="0">
-                        <a:latin typeface="Cambria Math" panose="02040503050406030204" pitchFamily="18" charset="0"/>
-                      </a:rPr>
-                      <m:t>𝑖</m:t>
-                    </m:r>
-                    <m:r>
-                      <a:rPr lang="de-AT" b="0" i="1" smtClean="0">
-                        <a:latin typeface="Cambria Math" panose="02040503050406030204" pitchFamily="18" charset="0"/>
-                      </a:rPr>
-                      <m:t>=1,…</m:t>
-                    </m:r>
-                    <m:r>
-                      <a:rPr lang="de-AT" b="0" i="1" smtClean="0">
-                        <a:latin typeface="Cambria Math" panose="02040503050406030204" pitchFamily="18" charset="0"/>
-                      </a:rPr>
-                      <m:t>𝑚</m:t>
-                    </m:r>
-                    <m:r>
-                      <a:rPr lang="de-AT" b="0" i="1" smtClean="0">
-                        <a:latin typeface="Cambria Math" panose="02040503050406030204" pitchFamily="18" charset="0"/>
-                      </a:rPr>
-                      <m:t>, </m:t>
-                    </m:r>
-                    <m:r>
-                      <a:rPr lang="de-AT" b="0" i="1" smtClean="0">
-                        <a:latin typeface="Cambria Math" panose="02040503050406030204" pitchFamily="18" charset="0"/>
-                      </a:rPr>
-                      <m:t>𝑗</m:t>
-                    </m:r>
-                    <m:r>
-                      <a:rPr lang="de-AT" b="0" i="1" smtClean="0">
-                        <a:latin typeface="Cambria Math" panose="02040503050406030204" pitchFamily="18" charset="0"/>
-                      </a:rPr>
-                      <m:t>=1,…</m:t>
-                    </m:r>
-                    <m:r>
-                      <a:rPr lang="de-AT" b="0" i="1" smtClean="0">
-                        <a:latin typeface="Cambria Math" panose="02040503050406030204" pitchFamily="18" charset="0"/>
-                      </a:rPr>
-                      <m:t>𝑛</m:t>
-                    </m:r>
-                  </m:oMath>
-                </a14:m>
-                <a:endParaRPr lang="de-DE" dirty="0"/>
-              </a:p>
-              <a:p>
-                <a:endParaRPr lang="de-DE" dirty="0"/>
-              </a:p>
-              <a:p>
-                <a:r>
-                  <a:rPr lang="de-DE" dirty="0"/>
-                  <a:t>Sind jeweils die Koeffizienten des Gleichungssystem </a:t>
-                </a:r>
-              </a:p>
-            </p:txBody>
-          </p:sp>
-        </mc:Choice>
-        <mc:Fallback>
-          <p:sp>
-            <p:nvSpPr>
-              <p:cNvPr id="5" name="Textfeld 4">
-                <a:extLst>
-                  <a:ext uri="{FF2B5EF4-FFF2-40B4-BE49-F238E27FC236}">
-                    <a16:creationId xmlns:a16="http://schemas.microsoft.com/office/drawing/2014/main" id="{FCD08D45-4031-F638-446D-37BC3468E4C4}"/>
-                  </a:ext>
-                </a:extLst>
-              </p:cNvPr>
-              <p:cNvSpPr txBox="1">
-                <a:spLocks noRot="1" noChangeAspect="1" noMove="1" noResize="1" noEditPoints="1" noAdjustHandles="1" noChangeArrowheads="1" noChangeShapeType="1" noTextEdit="1"/>
-              </p:cNvSpPr>
-              <p:nvPr/>
-            </p:nvSpPr>
-            <p:spPr>
-              <a:xfrm>
-                <a:off x="5511114" y="1692876"/>
-                <a:ext cx="5076646" cy="945643"/>
-              </a:xfrm>
-              <a:prstGeom prst="rect">
-                <a:avLst/>
-              </a:prstGeom>
-              <a:blipFill>
-                <a:blip r:embed="rId3"/>
-                <a:stretch>
-                  <a:fillRect l="-748" t="-2667" b="-10667"/>
-                </a:stretch>
-              </a:blipFill>
-            </p:spPr>
-            <p:txBody>
-              <a:bodyPr/>
-              <a:lstStyle/>
-              <a:p>
-                <a:r>
-                  <a:rPr lang="de-DE">
-                    <a:noFill/>
-                  </a:rPr>
-                  <a:t> </a:t>
-                </a:r>
-              </a:p>
-            </p:txBody>
-          </p:sp>
-        </mc:Fallback>
-      </mc:AlternateContent>
-    </p:spTree>
-    <p:extLst>
-      <p:ext uri="{BB962C8B-B14F-4D97-AF65-F5344CB8AC3E}">
-        <p14:creationId xmlns:p14="http://schemas.microsoft.com/office/powerpoint/2010/main" val="4183699866"/>
-      </p:ext>
-    </p:extLst>
-  </p:cSld>
-  <p:clrMapOvr>
-    <a:masterClrMapping/>
-  </p:clrMapOvr>
-</p:sld>
-</file>
-
-<file path=ppt/slides/slide10.xml><?xml version="1.0" encoding="utf-8"?>
-<p:sld xmlns:a="http://schemas.openxmlformats.org/drawingml/2006/main" xmlns:r="http://schemas.openxmlformats.org/officeDocument/2006/relationships" xmlns:p="http://schemas.openxmlformats.org/presentationml/2006/main">
-  <p:cSld>
-    <p:spTree>
-      <p:nvGrpSpPr>
-        <p:cNvPr id="1" name=""/>
-        <p:cNvGrpSpPr/>
-        <p:nvPr/>
-      </p:nvGrpSpPr>
-      <p:grpSpPr>
-        <a:xfrm>
-          <a:off x="0" y="0"/>
-          <a:ext cx="0" cy="0"/>
-          <a:chOff x="0" y="0"/>
-          <a:chExt cx="0" cy="0"/>
-        </a:xfrm>
-      </p:grpSpPr>
-      <p:sp>
-        <p:nvSpPr>
-          <p:cNvPr id="2" name="Titel 1">
-            <a:extLst>
-              <a:ext uri="{FF2B5EF4-FFF2-40B4-BE49-F238E27FC236}">
-                <a16:creationId xmlns:a16="http://schemas.microsoft.com/office/drawing/2014/main" id="{27DCC0C4-8C13-B557-46BD-BDC15ADD47BF}"/>
+      <p:sp>
+        <p:nvSpPr>
+          <p:cNvPr id="3" name="Titel 2">
+            <a:extLst>
+              <a:ext uri="{FF2B5EF4-FFF2-40B4-BE49-F238E27FC236}">
+                <a16:creationId xmlns:a16="http://schemas.microsoft.com/office/drawing/2014/main" id="{4D079BB1-02B5-486F-3BC1-C8465249082A}"/>
               </a:ext>
             </a:extLst>
           </p:cNvPr>
@@ -4632,346 +4312,158 @@
           <a:p>
             <a:r>
               <a:rPr lang="de-DE" dirty="0"/>
-              <a:t>Wie ist das Schema</a:t>
-            </a:r>
-          </a:p>
-        </p:txBody>
-      </p:sp>
-      <p:sp>
-        <p:nvSpPr>
-          <p:cNvPr id="3" name="Datumsplatzhalter 2">
-            <a:extLst>
-              <a:ext uri="{FF2B5EF4-FFF2-40B4-BE49-F238E27FC236}">
-                <a16:creationId xmlns:a16="http://schemas.microsoft.com/office/drawing/2014/main" id="{34161BFE-69E9-EDF8-8284-EAA9A7FF111A}"/>
-              </a:ext>
-            </a:extLst>
-          </p:cNvPr>
-          <p:cNvSpPr>
-            <a:spLocks noGrp="1"/>
-          </p:cNvSpPr>
-          <p:nvPr>
-            <p:ph type="dt" sz="half" idx="2"/>
-          </p:nvPr>
-        </p:nvSpPr>
-        <p:spPr/>
-        <p:txBody>
-          <a:bodyPr/>
+              <a:t>Lösen von Linearen </a:t>
+            </a:r>
+            <a:r>
+              <a:rPr lang="de-DE" dirty="0" err="1"/>
+              <a:t>Gleichungsystemen</a:t>
+            </a:r>
+            <a:endParaRPr lang="de-DE" dirty="0"/>
+          </a:p>
+        </p:txBody>
+      </p:sp>
+      <p:sp>
+        <p:nvSpPr>
+          <p:cNvPr id="5" name="Textfeld 4">
+            <a:extLst>
+              <a:ext uri="{FF2B5EF4-FFF2-40B4-BE49-F238E27FC236}">
+                <a16:creationId xmlns:a16="http://schemas.microsoft.com/office/drawing/2014/main" id="{06CBBB91-92AA-7E78-A8EA-0A6C57924B97}"/>
+              </a:ext>
+            </a:extLst>
+          </p:cNvPr>
+          <p:cNvSpPr txBox="1"/>
+          <p:nvPr/>
+        </p:nvSpPr>
+        <p:spPr>
+          <a:xfrm>
+            <a:off x="831511" y="2400802"/>
+            <a:ext cx="6340814" cy="2862322"/>
+          </a:xfrm>
+          <a:prstGeom prst="rect">
+            <a:avLst/>
+          </a:prstGeom>
+          <a:noFill/>
+        </p:spPr>
+        <p:txBody>
+          <a:bodyPr wrap="square" rtlCol="0">
+            <a:spAutoFit/>
+          </a:bodyPr>
           <a:lstStyle/>
           <a:p>
-            <a:pPr algn="ctr"/>
-            <a:fld id="{7C3CDC0F-71BF-B840-812C-9588125E0BFE}" type="datetime6">
-              <a:rPr lang="de-AT" smtClean="0"/>
-              <a:pPr algn="ctr"/>
-              <a:t>November 24</a:t>
-            </a:fld>
-            <a:endParaRPr lang="de-AT" dirty="0"/>
-          </a:p>
-        </p:txBody>
-      </p:sp>
-      <p:sp>
-        <p:nvSpPr>
-          <p:cNvPr id="4" name="Fußzeilenplatzhalter 3">
-            <a:extLst>
-              <a:ext uri="{FF2B5EF4-FFF2-40B4-BE49-F238E27FC236}">
-                <a16:creationId xmlns:a16="http://schemas.microsoft.com/office/drawing/2014/main" id="{6FEEA7DE-BA8C-CCF5-CBB9-E3078E70A7AE}"/>
-              </a:ext>
-            </a:extLst>
-          </p:cNvPr>
-          <p:cNvSpPr>
-            <a:spLocks noGrp="1"/>
-          </p:cNvSpPr>
-          <p:nvPr>
-            <p:ph type="ftr" sz="quarter" idx="3"/>
-          </p:nvPr>
-        </p:nvSpPr>
-        <p:spPr/>
-        <p:txBody>
-          <a:bodyPr/>
-          <a:lstStyle/>
-          <a:p>
-            <a:pPr algn="ctr"/>
-            <a:r>
-              <a:rPr lang="de-AT"/>
-              <a:t>Titel oder Vortragender</a:t>
-            </a:r>
-            <a:endParaRPr lang="de-AT" dirty="0"/>
-          </a:p>
-        </p:txBody>
-      </p:sp>
-      <p:sp>
-        <p:nvSpPr>
-          <p:cNvPr id="5" name="Foliennummernplatzhalter 4">
-            <a:extLst>
-              <a:ext uri="{FF2B5EF4-FFF2-40B4-BE49-F238E27FC236}">
-                <a16:creationId xmlns:a16="http://schemas.microsoft.com/office/drawing/2014/main" id="{303954EF-8DFF-448B-CB84-3FF7E267684F}"/>
-              </a:ext>
-            </a:extLst>
-          </p:cNvPr>
-          <p:cNvSpPr>
-            <a:spLocks noGrp="1"/>
-          </p:cNvSpPr>
-          <p:nvPr>
-            <p:ph type="sldNum" sz="quarter" idx="4"/>
-          </p:nvPr>
-        </p:nvSpPr>
-        <p:spPr/>
-        <p:txBody>
-          <a:bodyPr/>
-          <a:lstStyle/>
-          <a:p>
-            <a:pPr algn="r"/>
-            <a:fld id="{EBA229B5-7CFD-BC45-B1DD-7E8FA6FF2A01}" type="slidenum">
-              <a:rPr lang="de-AT" smtClean="0"/>
-              <a:pPr algn="r"/>
-              <a:t>10</a:t>
-            </a:fld>
-            <a:endParaRPr lang="de-AT" dirty="0"/>
+            <a:r>
+              <a:rPr lang="de-DE" dirty="0"/>
+              <a:t>Ein lineares </a:t>
+            </a:r>
+            <a:r>
+              <a:rPr lang="de-DE" dirty="0" err="1"/>
+              <a:t>Gleichungsystem</a:t>
+            </a:r>
+            <a:r>
+              <a:rPr lang="de-DE" dirty="0"/>
+              <a:t> aufgebaut durch Variablen </a:t>
+            </a:r>
+            <a:r>
+              <a:rPr lang="de-DE" dirty="0" err="1"/>
+              <a:t>x,y,z</a:t>
+            </a:r>
+            <a:r>
+              <a:rPr lang="de-DE" dirty="0"/>
+              <a:t>… und Koeffizienten vor den Variablen.</a:t>
+            </a:r>
+          </a:p>
+          <a:p>
+            <a:endParaRPr lang="de-DE" dirty="0"/>
+          </a:p>
+          <a:p>
+            <a:endParaRPr lang="de-DE" dirty="0"/>
+          </a:p>
+          <a:p>
+            <a:r>
+              <a:rPr lang="de-DE" dirty="0"/>
+              <a:t>Eine Lösung ist dann ein Tripel (</a:t>
+            </a:r>
+            <a:r>
+              <a:rPr lang="de-DE" dirty="0" err="1"/>
+              <a:t>x,y,z</a:t>
+            </a:r>
+            <a:r>
+              <a:rPr lang="de-DE" dirty="0"/>
+              <a:t>) aus Werten, welche das gegebene </a:t>
+            </a:r>
+            <a:r>
+              <a:rPr lang="de-DE" dirty="0" err="1"/>
+              <a:t>Gleichungsystem</a:t>
+            </a:r>
+            <a:r>
+              <a:rPr lang="de-DE" dirty="0"/>
+              <a:t> löst.</a:t>
+            </a:r>
+          </a:p>
+          <a:p>
+            <a:endParaRPr lang="de-DE" dirty="0"/>
+          </a:p>
+          <a:p>
+            <a:endParaRPr lang="de-DE" dirty="0"/>
+          </a:p>
+          <a:p>
+            <a:r>
+              <a:rPr lang="de-DE" dirty="0"/>
+              <a:t>Im 3D Raum kann man sich die Lösung als Schnittpunkt von verschiedenen Ebenen vorstellen.</a:t>
+            </a:r>
           </a:p>
         </p:txBody>
       </p:sp>
       <p:pic>
         <p:nvPicPr>
-          <p:cNvPr id="6" name="Grafik 5">
-            <a:extLst>
-              <a:ext uri="{FF2B5EF4-FFF2-40B4-BE49-F238E27FC236}">
-                <a16:creationId xmlns:a16="http://schemas.microsoft.com/office/drawing/2014/main" id="{D0CA8D0F-BE51-B3F2-FF9A-0A5705269547}"/>
+          <p:cNvPr id="1026" name="Picture 2" descr="undefined">
+            <a:extLst>
+              <a:ext uri="{FF2B5EF4-FFF2-40B4-BE49-F238E27FC236}">
+                <a16:creationId xmlns:a16="http://schemas.microsoft.com/office/drawing/2014/main" id="{C0946B48-1D17-645D-1CD4-E0AC59C4CA08}"/>
               </a:ext>
             </a:extLst>
           </p:cNvPr>
           <p:cNvPicPr>
-            <a:picLocks noChangeAspect="1"/>
+            <a:picLocks noChangeAspect="1" noChangeArrowheads="1"/>
           </p:cNvPicPr>
           <p:nvPr/>
         </p:nvPicPr>
         <p:blipFill>
-          <a:blip r:embed="rId2"/>
+          <a:blip r:embed="rId3">
+            <a:extLst>
+              <a:ext uri="{28A0092B-C50C-407E-A947-70E740481C1C}">
+                <a14:useLocalDpi xmlns:a14="http://schemas.microsoft.com/office/drawing/2010/main" val="0"/>
+              </a:ext>
+            </a:extLst>
+          </a:blip>
+          <a:srcRect/>
           <a:stretch>
             <a:fillRect/>
           </a:stretch>
         </p:blipFill>
-        <p:spPr>
-          <a:xfrm>
-            <a:off x="680981" y="810494"/>
-            <a:ext cx="10698738" cy="2850811"/>
+        <p:spPr bwMode="auto">
+          <a:xfrm>
+            <a:off x="8605194" y="142875"/>
+            <a:ext cx="3286125" cy="3286125"/>
           </a:xfrm>
           <a:prstGeom prst="rect">
             <a:avLst/>
           </a:prstGeom>
-        </p:spPr>
-      </p:pic>
-      <p:pic>
-        <p:nvPicPr>
-          <p:cNvPr id="7" name="Grafik 6">
-            <a:extLst>
-              <a:ext uri="{FF2B5EF4-FFF2-40B4-BE49-F238E27FC236}">
-                <a16:creationId xmlns:a16="http://schemas.microsoft.com/office/drawing/2014/main" id="{19557F04-4094-FC75-C9EE-D0D22FF21802}"/>
-              </a:ext>
-            </a:extLst>
-          </p:cNvPr>
-          <p:cNvPicPr>
-            <a:picLocks noChangeAspect="1"/>
-          </p:cNvPicPr>
-          <p:nvPr/>
-        </p:nvPicPr>
-        <p:blipFill>
-          <a:blip r:embed="rId3"/>
-          <a:stretch>
-            <a:fillRect/>
-          </a:stretch>
-        </p:blipFill>
-        <p:spPr>
-          <a:xfrm>
-            <a:off x="5836936" y="967657"/>
-            <a:ext cx="5902173" cy="3575769"/>
-          </a:xfrm>
-          <a:prstGeom prst="rect">
-            <a:avLst/>
-          </a:prstGeom>
+          <a:noFill/>
+          <a:extLst>
+            <a:ext uri="{909E8E84-426E-40DD-AFC4-6F175D3DCCD1}">
+              <a14:hiddenFill xmlns:a14="http://schemas.microsoft.com/office/drawing/2010/main">
+                <a:solidFill>
+                  <a:srgbClr val="FFFFFF"/>
+                </a:solidFill>
+              </a14:hiddenFill>
+            </a:ext>
+          </a:extLst>
         </p:spPr>
       </p:pic>
     </p:spTree>
     <p:extLst>
       <p:ext uri="{BB962C8B-B14F-4D97-AF65-F5344CB8AC3E}">
-        <p14:creationId xmlns:p14="http://schemas.microsoft.com/office/powerpoint/2010/main" val="3554635358"/>
-      </p:ext>
-    </p:extLst>
-  </p:cSld>
-  <p:clrMapOvr>
-    <a:masterClrMapping/>
-  </p:clrMapOvr>
-</p:sld>
-</file>
-
-<file path=ppt/slides/slide11.xml><?xml version="1.0" encoding="utf-8"?>
-<p:sld xmlns:a="http://schemas.openxmlformats.org/drawingml/2006/main" xmlns:r="http://schemas.openxmlformats.org/officeDocument/2006/relationships" xmlns:p="http://schemas.openxmlformats.org/presentationml/2006/main">
-  <p:cSld>
-    <p:spTree>
-      <p:nvGrpSpPr>
-        <p:cNvPr id="1" name=""/>
-        <p:cNvGrpSpPr/>
-        <p:nvPr/>
-      </p:nvGrpSpPr>
-      <p:grpSpPr>
-        <a:xfrm>
-          <a:off x="0" y="0"/>
-          <a:ext cx="0" cy="0"/>
-          <a:chOff x="0" y="0"/>
-          <a:chExt cx="0" cy="0"/>
-        </a:xfrm>
-      </p:grpSpPr>
-      <p:sp>
-        <p:nvSpPr>
-          <p:cNvPr id="2" name="Titel 1">
-            <a:extLst>
-              <a:ext uri="{FF2B5EF4-FFF2-40B4-BE49-F238E27FC236}">
-                <a16:creationId xmlns:a16="http://schemas.microsoft.com/office/drawing/2014/main" id="{E4A0AEA2-929B-9A5F-D44C-1ABD344B151D}"/>
-              </a:ext>
-            </a:extLst>
-          </p:cNvPr>
-          <p:cNvSpPr>
-            <a:spLocks noGrp="1"/>
-          </p:cNvSpPr>
-          <p:nvPr>
-            <p:ph type="title"/>
-          </p:nvPr>
-        </p:nvSpPr>
-        <p:spPr/>
-        <p:txBody>
-          <a:bodyPr/>
-          <a:lstStyle/>
-          <a:p>
-            <a:r>
-              <a:rPr lang="de-DE" dirty="0"/>
-              <a:t>Ein Beispiel der Umformungen</a:t>
-            </a:r>
-          </a:p>
-        </p:txBody>
-      </p:sp>
-      <p:sp>
-        <p:nvSpPr>
-          <p:cNvPr id="3" name="Datumsplatzhalter 2">
-            <a:extLst>
-              <a:ext uri="{FF2B5EF4-FFF2-40B4-BE49-F238E27FC236}">
-                <a16:creationId xmlns:a16="http://schemas.microsoft.com/office/drawing/2014/main" id="{44841538-0FE6-16AC-0428-2DA8D68803BC}"/>
-              </a:ext>
-            </a:extLst>
-          </p:cNvPr>
-          <p:cNvSpPr>
-            <a:spLocks noGrp="1"/>
-          </p:cNvSpPr>
-          <p:nvPr>
-            <p:ph type="dt" sz="half" idx="2"/>
-          </p:nvPr>
-        </p:nvSpPr>
-        <p:spPr/>
-        <p:txBody>
-          <a:bodyPr/>
-          <a:lstStyle/>
-          <a:p>
-            <a:pPr algn="ctr"/>
-            <a:fld id="{7C3CDC0F-71BF-B840-812C-9588125E0BFE}" type="datetime6">
-              <a:rPr lang="de-AT" smtClean="0"/>
-              <a:pPr algn="ctr"/>
-              <a:t>November 24</a:t>
-            </a:fld>
-            <a:endParaRPr lang="de-AT" dirty="0"/>
-          </a:p>
-        </p:txBody>
-      </p:sp>
-      <p:sp>
-        <p:nvSpPr>
-          <p:cNvPr id="4" name="Fußzeilenplatzhalter 3">
-            <a:extLst>
-              <a:ext uri="{FF2B5EF4-FFF2-40B4-BE49-F238E27FC236}">
-                <a16:creationId xmlns:a16="http://schemas.microsoft.com/office/drawing/2014/main" id="{76D49564-AEB4-00F6-DAA3-516B220569D1}"/>
-              </a:ext>
-            </a:extLst>
-          </p:cNvPr>
-          <p:cNvSpPr>
-            <a:spLocks noGrp="1"/>
-          </p:cNvSpPr>
-          <p:nvPr>
-            <p:ph type="ftr" sz="quarter" idx="3"/>
-          </p:nvPr>
-        </p:nvSpPr>
-        <p:spPr/>
-        <p:txBody>
-          <a:bodyPr/>
-          <a:lstStyle/>
-          <a:p>
-            <a:pPr algn="ctr"/>
-            <a:r>
-              <a:rPr lang="de-AT"/>
-              <a:t>Titel oder Vortragender</a:t>
-            </a:r>
-            <a:endParaRPr lang="de-AT" dirty="0"/>
-          </a:p>
-        </p:txBody>
-      </p:sp>
-      <p:sp>
-        <p:nvSpPr>
-          <p:cNvPr id="5" name="Foliennummernplatzhalter 4">
-            <a:extLst>
-              <a:ext uri="{FF2B5EF4-FFF2-40B4-BE49-F238E27FC236}">
-                <a16:creationId xmlns:a16="http://schemas.microsoft.com/office/drawing/2014/main" id="{B1F07F47-AB5E-0BB2-CA51-228A504F4789}"/>
-              </a:ext>
-            </a:extLst>
-          </p:cNvPr>
-          <p:cNvSpPr>
-            <a:spLocks noGrp="1"/>
-          </p:cNvSpPr>
-          <p:nvPr>
-            <p:ph type="sldNum" sz="quarter" idx="4"/>
-          </p:nvPr>
-        </p:nvSpPr>
-        <p:spPr/>
-        <p:txBody>
-          <a:bodyPr/>
-          <a:lstStyle/>
-          <a:p>
-            <a:pPr algn="r"/>
-            <a:fld id="{EBA229B5-7CFD-BC45-B1DD-7E8FA6FF2A01}" type="slidenum">
-              <a:rPr lang="de-AT" smtClean="0"/>
-              <a:pPr algn="r"/>
-              <a:t>11</a:t>
-            </a:fld>
-            <a:endParaRPr lang="de-AT" dirty="0"/>
-          </a:p>
-        </p:txBody>
-      </p:sp>
-      <p:pic>
-        <p:nvPicPr>
-          <p:cNvPr id="6" name="Grafik 5">
-            <a:extLst>
-              <a:ext uri="{FF2B5EF4-FFF2-40B4-BE49-F238E27FC236}">
-                <a16:creationId xmlns:a16="http://schemas.microsoft.com/office/drawing/2014/main" id="{BEEB3402-5183-6763-3D06-7F4F341E7D3B}"/>
-              </a:ext>
-            </a:extLst>
-          </p:cNvPr>
-          <p:cNvPicPr>
-            <a:picLocks noChangeAspect="1"/>
-          </p:cNvPicPr>
-          <p:nvPr/>
-        </p:nvPicPr>
-        <p:blipFill>
-          <a:blip r:embed="rId2"/>
-          <a:srcRect b="36821"/>
-          <a:stretch/>
-        </p:blipFill>
-        <p:spPr>
-          <a:xfrm>
-            <a:off x="2626231" y="1281199"/>
-            <a:ext cx="6939537" cy="3476154"/>
-          </a:xfrm>
-          <a:prstGeom prst="rect">
-            <a:avLst/>
-          </a:prstGeom>
-        </p:spPr>
-      </p:pic>
-    </p:spTree>
-    <p:extLst>
-      <p:ext uri="{BB962C8B-B14F-4D97-AF65-F5344CB8AC3E}">
-        <p14:creationId xmlns:p14="http://schemas.microsoft.com/office/powerpoint/2010/main" val="2144275701"/>
+        <p14:creationId xmlns:p14="http://schemas.microsoft.com/office/powerpoint/2010/main" val="1415824048"/>
       </p:ext>
     </p:extLst>
   </p:cSld>
@@ -5000,18 +4492,18 @@
       </p:grpSpPr>
       <p:sp>
         <p:nvSpPr>
-          <p:cNvPr id="2" name="Inhaltsplatzhalter 1">
-            <a:extLst>
-              <a:ext uri="{FF2B5EF4-FFF2-40B4-BE49-F238E27FC236}">
-                <a16:creationId xmlns:a16="http://schemas.microsoft.com/office/drawing/2014/main" id="{DA5D320C-9282-772C-233D-338B5923D9F9}"/>
-              </a:ext>
-            </a:extLst>
-          </p:cNvPr>
-          <p:cNvSpPr>
-            <a:spLocks noGrp="1"/>
-          </p:cNvSpPr>
-          <p:nvPr>
-            <p:ph idx="1"/>
+          <p:cNvPr id="2" name="Titel 1">
+            <a:extLst>
+              <a:ext uri="{FF2B5EF4-FFF2-40B4-BE49-F238E27FC236}">
+                <a16:creationId xmlns:a16="http://schemas.microsoft.com/office/drawing/2014/main" id="{E1B51C9B-F884-C230-C721-2989D3B3F505}"/>
+              </a:ext>
+            </a:extLst>
+          </p:cNvPr>
+          <p:cNvSpPr>
+            <a:spLocks noGrp="1"/>
+          </p:cNvSpPr>
+          <p:nvPr>
+            <p:ph type="title"/>
           </p:nvPr>
         </p:nvSpPr>
         <p:spPr/>
@@ -5019,24 +4511,32 @@
           <a:bodyPr/>
           <a:lstStyle/>
           <a:p>
+            <a:r>
+              <a:rPr lang="de-DE" dirty="0"/>
+              <a:t>Allgemeine Form des linearen </a:t>
+            </a:r>
+            <a:r>
+              <a:rPr lang="de-DE" dirty="0" err="1"/>
+              <a:t>Gleichungsystems</a:t>
+            </a:r>
             <a:endParaRPr lang="de-DE" dirty="0"/>
           </a:p>
         </p:txBody>
       </p:sp>
       <p:sp>
         <p:nvSpPr>
-          <p:cNvPr id="3" name="Titel 2">
-            <a:extLst>
-              <a:ext uri="{FF2B5EF4-FFF2-40B4-BE49-F238E27FC236}">
-                <a16:creationId xmlns:a16="http://schemas.microsoft.com/office/drawing/2014/main" id="{02A30AC3-8305-FE6B-5D27-618E4182BAEB}"/>
-              </a:ext>
-            </a:extLst>
-          </p:cNvPr>
-          <p:cNvSpPr>
-            <a:spLocks noGrp="1"/>
-          </p:cNvSpPr>
-          <p:nvPr>
-            <p:ph type="title"/>
+          <p:cNvPr id="3" name="Datumsplatzhalter 2">
+            <a:extLst>
+              <a:ext uri="{FF2B5EF4-FFF2-40B4-BE49-F238E27FC236}">
+                <a16:creationId xmlns:a16="http://schemas.microsoft.com/office/drawing/2014/main" id="{0E902743-B8E3-88BE-897A-294156648006}"/>
+              </a:ext>
+            </a:extLst>
+          </p:cNvPr>
+          <p:cNvSpPr>
+            <a:spLocks noGrp="1"/>
+          </p:cNvSpPr>
+          <p:nvPr>
+            <p:ph type="dt" sz="half" idx="2"/>
           </p:nvPr>
         </p:nvSpPr>
         <p:spPr/>
@@ -5044,24 +4544,83 @@
           <a:bodyPr/>
           <a:lstStyle/>
           <a:p>
-            <a:r>
-              <a:rPr lang="de-DE" dirty="0"/>
-              <a:t>Homogenes </a:t>
-            </a:r>
-            <a:r>
-              <a:rPr lang="de-DE" dirty="0" err="1"/>
-              <a:t>Gleichungsystem</a:t>
-            </a:r>
-            <a:endParaRPr lang="de-DE" dirty="0"/>
+            <a:pPr algn="ctr"/>
+            <a:fld id="{7C3CDC0F-71BF-B840-812C-9588125E0BFE}" type="datetime6">
+              <a:rPr lang="de-AT" smtClean="0"/>
+              <a:pPr algn="ctr"/>
+              <a:t>November 24</a:t>
+            </a:fld>
+            <a:endParaRPr lang="de-AT" dirty="0"/>
+          </a:p>
+        </p:txBody>
+      </p:sp>
+      <p:sp>
+        <p:nvSpPr>
+          <p:cNvPr id="4" name="Fußzeilenplatzhalter 3">
+            <a:extLst>
+              <a:ext uri="{FF2B5EF4-FFF2-40B4-BE49-F238E27FC236}">
+                <a16:creationId xmlns:a16="http://schemas.microsoft.com/office/drawing/2014/main" id="{7AF39D73-7471-56F7-6CD2-AAD422112FBE}"/>
+              </a:ext>
+            </a:extLst>
+          </p:cNvPr>
+          <p:cNvSpPr>
+            <a:spLocks noGrp="1"/>
+          </p:cNvSpPr>
+          <p:nvPr>
+            <p:ph type="ftr" sz="quarter" idx="3"/>
+          </p:nvPr>
+        </p:nvSpPr>
+        <p:spPr/>
+        <p:txBody>
+          <a:bodyPr/>
+          <a:lstStyle/>
+          <a:p>
+            <a:pPr algn="ctr"/>
+            <a:r>
+              <a:rPr lang="de-AT"/>
+              <a:t>Titel oder Vortragender</a:t>
+            </a:r>
+            <a:endParaRPr lang="de-AT" dirty="0"/>
+          </a:p>
+        </p:txBody>
+      </p:sp>
+      <p:sp>
+        <p:nvSpPr>
+          <p:cNvPr id="5" name="Foliennummernplatzhalter 4">
+            <a:extLst>
+              <a:ext uri="{FF2B5EF4-FFF2-40B4-BE49-F238E27FC236}">
+                <a16:creationId xmlns:a16="http://schemas.microsoft.com/office/drawing/2014/main" id="{B6727013-9550-B805-45D2-686B5DF47F6D}"/>
+              </a:ext>
+            </a:extLst>
+          </p:cNvPr>
+          <p:cNvSpPr>
+            <a:spLocks noGrp="1"/>
+          </p:cNvSpPr>
+          <p:nvPr>
+            <p:ph type="sldNum" sz="quarter" idx="4"/>
+          </p:nvPr>
+        </p:nvSpPr>
+        <p:spPr/>
+        <p:txBody>
+          <a:bodyPr/>
+          <a:lstStyle/>
+          <a:p>
+            <a:pPr algn="r"/>
+            <a:fld id="{EBA229B5-7CFD-BC45-B1DD-7E8FA6FF2A01}" type="slidenum">
+              <a:rPr lang="de-AT" smtClean="0"/>
+              <a:pPr algn="r"/>
+              <a:t>2</a:t>
+            </a:fld>
+            <a:endParaRPr lang="de-AT" dirty="0"/>
           </a:p>
         </p:txBody>
       </p:sp>
       <p:pic>
         <p:nvPicPr>
-          <p:cNvPr id="4" name="Grafik 3">
-            <a:extLst>
-              <a:ext uri="{FF2B5EF4-FFF2-40B4-BE49-F238E27FC236}">
-                <a16:creationId xmlns:a16="http://schemas.microsoft.com/office/drawing/2014/main" id="{96517863-6624-BDB1-EA5E-B31E89FF8FF0}"/>
+          <p:cNvPr id="6" name="Grafik 5">
+            <a:extLst>
+              <a:ext uri="{FF2B5EF4-FFF2-40B4-BE49-F238E27FC236}">
+                <a16:creationId xmlns:a16="http://schemas.microsoft.com/office/drawing/2014/main" id="{99527D20-0ADB-82BE-7D0E-0B2507C2A046}"/>
               </a:ext>
             </a:extLst>
           </p:cNvPr>
@@ -5078,8 +4637,152 @@
         </p:blipFill>
         <p:spPr>
           <a:xfrm>
-            <a:off x="3486150" y="981075"/>
-            <a:ext cx="7532856" cy="5001573"/>
+            <a:off x="766706" y="993775"/>
+            <a:ext cx="4610100" cy="1498600"/>
+          </a:xfrm>
+          <a:prstGeom prst="rect">
+            <a:avLst/>
+          </a:prstGeom>
+        </p:spPr>
+      </p:pic>
+      <p:sp>
+        <p:nvSpPr>
+          <p:cNvPr id="7" name="Pfeil nach rechts 6">
+            <a:extLst>
+              <a:ext uri="{FF2B5EF4-FFF2-40B4-BE49-F238E27FC236}">
+                <a16:creationId xmlns:a16="http://schemas.microsoft.com/office/drawing/2014/main" id="{8E7321EE-5573-8CBA-2E32-99C0E80F1456}"/>
+              </a:ext>
+            </a:extLst>
+          </p:cNvPr>
+          <p:cNvSpPr/>
+          <p:nvPr/>
+        </p:nvSpPr>
+        <p:spPr>
+          <a:xfrm rot="2341880" flipV="1">
+            <a:off x="4899832" y="2990983"/>
+            <a:ext cx="1443037" cy="369331"/>
+          </a:xfrm>
+          <a:prstGeom prst="rightArrow">
+            <a:avLst>
+              <a:gd name="adj1" fmla="val 50000"/>
+              <a:gd name="adj2" fmla="val 66728"/>
+            </a:avLst>
+          </a:prstGeom>
+        </p:spPr>
+        <p:style>
+          <a:lnRef idx="2">
+            <a:schemeClr val="accent1">
+              <a:shade val="15000"/>
+            </a:schemeClr>
+          </a:lnRef>
+          <a:fillRef idx="1">
+            <a:schemeClr val="accent1"/>
+          </a:fillRef>
+          <a:effectRef idx="0">
+            <a:schemeClr val="accent1"/>
+          </a:effectRef>
+          <a:fontRef idx="minor">
+            <a:schemeClr val="lt1"/>
+          </a:fontRef>
+        </p:style>
+        <p:txBody>
+          <a:bodyPr rtlCol="0" anchor="ctr"/>
+          <a:lstStyle/>
+          <a:p>
+            <a:pPr algn="ctr"/>
+            <a:endParaRPr lang="de-DE"/>
+          </a:p>
+        </p:txBody>
+      </p:sp>
+      <p:sp>
+        <p:nvSpPr>
+          <p:cNvPr id="8" name="Textfeld 7">
+            <a:extLst>
+              <a:ext uri="{FF2B5EF4-FFF2-40B4-BE49-F238E27FC236}">
+                <a16:creationId xmlns:a16="http://schemas.microsoft.com/office/drawing/2014/main" id="{22558BAD-35BF-4EFA-E01E-3FA9746BA182}"/>
+              </a:ext>
+            </a:extLst>
+          </p:cNvPr>
+          <p:cNvSpPr txBox="1"/>
+          <p:nvPr/>
+        </p:nvSpPr>
+        <p:spPr>
+          <a:xfrm>
+            <a:off x="5480514" y="2543772"/>
+            <a:ext cx="3008068" cy="369332"/>
+          </a:xfrm>
+          <a:prstGeom prst="rect">
+            <a:avLst/>
+          </a:prstGeom>
+          <a:noFill/>
+        </p:spPr>
+        <p:txBody>
+          <a:bodyPr wrap="none" rtlCol="0">
+            <a:spAutoFit/>
+          </a:bodyPr>
+          <a:lstStyle/>
+          <a:p>
+            <a:r>
+              <a:rPr lang="de-DE" dirty="0"/>
+              <a:t>Übergang zur Matrixgleichung</a:t>
+            </a:r>
+          </a:p>
+        </p:txBody>
+      </p:sp>
+      <p:pic>
+        <p:nvPicPr>
+          <p:cNvPr id="9" name="Grafik 8">
+            <a:extLst>
+              <a:ext uri="{FF2B5EF4-FFF2-40B4-BE49-F238E27FC236}">
+                <a16:creationId xmlns:a16="http://schemas.microsoft.com/office/drawing/2014/main" id="{FA999A14-DE81-541C-2194-D33C85B798CD}"/>
+              </a:ext>
+            </a:extLst>
+          </p:cNvPr>
+          <p:cNvPicPr>
+            <a:picLocks noChangeAspect="1"/>
+          </p:cNvPicPr>
+          <p:nvPr/>
+        </p:nvPicPr>
+        <p:blipFill>
+          <a:blip r:embed="rId3"/>
+          <a:stretch>
+            <a:fillRect/>
+          </a:stretch>
+        </p:blipFill>
+        <p:spPr>
+          <a:xfrm>
+            <a:off x="8649386" y="2537938"/>
+            <a:ext cx="1244600" cy="381000"/>
+          </a:xfrm>
+          <a:prstGeom prst="rect">
+            <a:avLst/>
+          </a:prstGeom>
+        </p:spPr>
+      </p:pic>
+      <p:pic>
+        <p:nvPicPr>
+          <p:cNvPr id="10" name="Grafik 9">
+            <a:extLst>
+              <a:ext uri="{FF2B5EF4-FFF2-40B4-BE49-F238E27FC236}">
+                <a16:creationId xmlns:a16="http://schemas.microsoft.com/office/drawing/2014/main" id="{DA452627-FA13-C70C-3F54-4D7B391C591C}"/>
+              </a:ext>
+            </a:extLst>
+          </p:cNvPr>
+          <p:cNvPicPr>
+            <a:picLocks noChangeAspect="1"/>
+          </p:cNvPicPr>
+          <p:nvPr/>
+        </p:nvPicPr>
+        <p:blipFill>
+          <a:blip r:embed="rId4"/>
+          <a:stretch>
+            <a:fillRect/>
+          </a:stretch>
+        </p:blipFill>
+        <p:spPr>
+          <a:xfrm>
+            <a:off x="5097682" y="3882307"/>
+            <a:ext cx="6781800" cy="1841500"/>
           </a:xfrm>
           <a:prstGeom prst="rect">
             <a:avLst/>
@@ -5089,7 +4792,7 @@
     </p:spTree>
     <p:extLst>
       <p:ext uri="{BB962C8B-B14F-4D97-AF65-F5344CB8AC3E}">
-        <p14:creationId xmlns:p14="http://schemas.microsoft.com/office/powerpoint/2010/main" val="2965457140"/>
+        <p14:creationId xmlns:p14="http://schemas.microsoft.com/office/powerpoint/2010/main" val="3931492862"/>
       </p:ext>
     </p:extLst>
   </p:cSld>
@@ -5118,10 +4821,10 @@
       </p:grpSpPr>
       <p:sp>
         <p:nvSpPr>
-          <p:cNvPr id="3" name="Titel 2">
-            <a:extLst>
-              <a:ext uri="{FF2B5EF4-FFF2-40B4-BE49-F238E27FC236}">
-                <a16:creationId xmlns:a16="http://schemas.microsoft.com/office/drawing/2014/main" id="{0CB04BDC-32B8-F902-7F78-A81C5C627CBA}"/>
+          <p:cNvPr id="2" name="Titel 1">
+            <a:extLst>
+              <a:ext uri="{FF2B5EF4-FFF2-40B4-BE49-F238E27FC236}">
+                <a16:creationId xmlns:a16="http://schemas.microsoft.com/office/drawing/2014/main" id="{960D81E3-9FCE-9250-4FAE-2E786F580109}"/>
               </a:ext>
             </a:extLst>
           </p:cNvPr>
@@ -5138,125 +4841,231 @@
           <a:lstStyle/>
           <a:p>
             <a:r>
+              <a:rPr lang="de-DE" dirty="0"/>
+              <a:t>Die Lösungsmenge / Lösungsraum und eine geometrische Interpretation</a:t>
+            </a:r>
+          </a:p>
+        </p:txBody>
+      </p:sp>
+      <p:sp>
+        <p:nvSpPr>
+          <p:cNvPr id="3" name="Datumsplatzhalter 2">
+            <a:extLst>
+              <a:ext uri="{FF2B5EF4-FFF2-40B4-BE49-F238E27FC236}">
+                <a16:creationId xmlns:a16="http://schemas.microsoft.com/office/drawing/2014/main" id="{CE9183B4-320E-0D19-EEEC-5995F9B5B10F}"/>
+              </a:ext>
+            </a:extLst>
+          </p:cNvPr>
+          <p:cNvSpPr>
+            <a:spLocks noGrp="1"/>
+          </p:cNvSpPr>
+          <p:nvPr>
+            <p:ph type="dt" sz="half" idx="2"/>
+          </p:nvPr>
+        </p:nvSpPr>
+        <p:spPr/>
+        <p:txBody>
+          <a:bodyPr/>
+          <a:lstStyle/>
+          <a:p>
+            <a:pPr algn="ctr"/>
+            <a:fld id="{7C3CDC0F-71BF-B840-812C-9588125E0BFE}" type="datetime6">
+              <a:rPr lang="de-AT" smtClean="0"/>
+              <a:pPr algn="ctr"/>
+              <a:t>November 24</a:t>
+            </a:fld>
+            <a:endParaRPr lang="de-AT" dirty="0"/>
+          </a:p>
+        </p:txBody>
+      </p:sp>
+      <p:sp>
+        <p:nvSpPr>
+          <p:cNvPr id="4" name="Fußzeilenplatzhalter 3">
+            <a:extLst>
+              <a:ext uri="{FF2B5EF4-FFF2-40B4-BE49-F238E27FC236}">
+                <a16:creationId xmlns:a16="http://schemas.microsoft.com/office/drawing/2014/main" id="{4B8C23A2-5A87-60E6-E906-82E8F849126C}"/>
+              </a:ext>
+            </a:extLst>
+          </p:cNvPr>
+          <p:cNvSpPr>
+            <a:spLocks noGrp="1"/>
+          </p:cNvSpPr>
+          <p:nvPr>
+            <p:ph type="ftr" sz="quarter" idx="3"/>
+          </p:nvPr>
+        </p:nvSpPr>
+        <p:spPr/>
+        <p:txBody>
+          <a:bodyPr/>
+          <a:lstStyle/>
+          <a:p>
+            <a:pPr algn="ctr"/>
+            <a:r>
+              <a:rPr lang="de-AT"/>
+              <a:t>Titel oder Vortragender</a:t>
+            </a:r>
+            <a:endParaRPr lang="de-AT" dirty="0"/>
+          </a:p>
+        </p:txBody>
+      </p:sp>
+      <p:sp>
+        <p:nvSpPr>
+          <p:cNvPr id="5" name="Foliennummernplatzhalter 4">
+            <a:extLst>
+              <a:ext uri="{FF2B5EF4-FFF2-40B4-BE49-F238E27FC236}">
+                <a16:creationId xmlns:a16="http://schemas.microsoft.com/office/drawing/2014/main" id="{76C75AAD-BD80-60DD-C7AB-74CE61B623F8}"/>
+              </a:ext>
+            </a:extLst>
+          </p:cNvPr>
+          <p:cNvSpPr>
+            <a:spLocks noGrp="1"/>
+          </p:cNvSpPr>
+          <p:nvPr>
+            <p:ph type="sldNum" sz="quarter" idx="4"/>
+          </p:nvPr>
+        </p:nvSpPr>
+        <p:spPr/>
+        <p:txBody>
+          <a:bodyPr/>
+          <a:lstStyle/>
+          <a:p>
+            <a:pPr algn="r"/>
+            <a:fld id="{EBA229B5-7CFD-BC45-B1DD-7E8FA6FF2A01}" type="slidenum">
+              <a:rPr lang="de-AT" smtClean="0"/>
+              <a:pPr algn="r"/>
+              <a:t>3</a:t>
+            </a:fld>
+            <a:endParaRPr lang="de-AT" dirty="0"/>
+          </a:p>
+        </p:txBody>
+      </p:sp>
+      <p:sp>
+        <p:nvSpPr>
+          <p:cNvPr id="6" name="Textfeld 5">
+            <a:extLst>
+              <a:ext uri="{FF2B5EF4-FFF2-40B4-BE49-F238E27FC236}">
+                <a16:creationId xmlns:a16="http://schemas.microsoft.com/office/drawing/2014/main" id="{177C3649-82D0-0AE2-67C5-6A8493ABAD12}"/>
+              </a:ext>
+            </a:extLst>
+          </p:cNvPr>
+          <p:cNvSpPr txBox="1"/>
+          <p:nvPr/>
+        </p:nvSpPr>
+        <p:spPr>
+          <a:xfrm>
+            <a:off x="684387" y="1485784"/>
+            <a:ext cx="6183784" cy="1754326"/>
+          </a:xfrm>
+          <a:prstGeom prst="rect">
+            <a:avLst/>
+          </a:prstGeom>
+          <a:noFill/>
+        </p:spPr>
+        <p:txBody>
+          <a:bodyPr wrap="square" rtlCol="0">
+            <a:spAutoFit/>
+          </a:bodyPr>
+          <a:lstStyle/>
+          <a:p>
+            <a:r>
+              <a:rPr lang="de-DE" dirty="0"/>
+              <a:t>Für ein lineares </a:t>
+            </a:r>
+            <a:r>
               <a:rPr lang="de-DE" dirty="0" err="1"/>
-              <a:t>Koeffizientenmatrix</a:t>
-            </a:r>
+              <a:t>Gleichungsystem</a:t>
+            </a:r>
+            <a:r>
+              <a:rPr lang="de-DE" dirty="0"/>
+              <a:t> haben wir folgende Möglichkeiten für Lösungen:</a:t>
+            </a:r>
+          </a:p>
+          <a:p>
             <a:endParaRPr lang="de-DE" dirty="0"/>
+          </a:p>
+          <a:p>
+            <a:pPr marL="285750" indent="-285750">
+              <a:buFont typeface="Arial" panose="020B0604020202020204" pitchFamily="34" charset="0"/>
+              <a:buChar char="•"/>
+            </a:pPr>
+            <a:r>
+              <a:rPr lang="de-DE" dirty="0"/>
+              <a:t>Keine Lösung</a:t>
+            </a:r>
+          </a:p>
+          <a:p>
+            <a:pPr marL="285750" indent="-285750">
+              <a:buFont typeface="Arial" panose="020B0604020202020204" pitchFamily="34" charset="0"/>
+              <a:buChar char="•"/>
+            </a:pPr>
+            <a:r>
+              <a:rPr lang="de-DE" dirty="0"/>
+              <a:t>unendlich viele Lösungen</a:t>
+            </a:r>
+          </a:p>
+          <a:p>
+            <a:pPr marL="285750" indent="-285750">
+              <a:buFont typeface="Arial" panose="020B0604020202020204" pitchFamily="34" charset="0"/>
+              <a:buChar char="•"/>
+            </a:pPr>
+            <a:r>
+              <a:rPr lang="de-DE" dirty="0"/>
+              <a:t>Eine exakte Lösung</a:t>
+            </a:r>
           </a:p>
         </p:txBody>
       </p:sp>
       <p:pic>
         <p:nvPicPr>
-          <p:cNvPr id="4" name="Grafik 3">
-            <a:extLst>
-              <a:ext uri="{FF2B5EF4-FFF2-40B4-BE49-F238E27FC236}">
-                <a16:creationId xmlns:a16="http://schemas.microsoft.com/office/drawing/2014/main" id="{6101A7C1-F249-6513-B976-678692BE7F33}"/>
+          <p:cNvPr id="2050" name="Picture 2" descr="undefined">
+            <a:extLst>
+              <a:ext uri="{FF2B5EF4-FFF2-40B4-BE49-F238E27FC236}">
+                <a16:creationId xmlns:a16="http://schemas.microsoft.com/office/drawing/2014/main" id="{54635527-AFAB-86C5-AB93-1C0F471499C7}"/>
               </a:ext>
             </a:extLst>
           </p:cNvPr>
           <p:cNvPicPr>
-            <a:picLocks noChangeAspect="1"/>
+            <a:picLocks noChangeAspect="1" noChangeArrowheads="1"/>
           </p:cNvPicPr>
           <p:nvPr/>
         </p:nvPicPr>
         <p:blipFill>
-          <a:blip r:embed="rId2"/>
+          <a:blip r:embed="rId2">
+            <a:extLst>
+              <a:ext uri="{28A0092B-C50C-407E-A947-70E740481C1C}">
+                <a14:useLocalDpi xmlns:a14="http://schemas.microsoft.com/office/drawing/2010/main" val="0"/>
+              </a:ext>
+            </a:extLst>
+          </a:blip>
+          <a:srcRect/>
           <a:stretch>
             <a:fillRect/>
           </a:stretch>
         </p:blipFill>
-        <p:spPr>
-          <a:xfrm>
-            <a:off x="5292555" y="1038225"/>
-            <a:ext cx="6642269" cy="4069374"/>
+        <p:spPr bwMode="auto">
+          <a:xfrm>
+            <a:off x="7298477" y="1267439"/>
+            <a:ext cx="3714866" cy="3714866"/>
           </a:xfrm>
           <a:prstGeom prst="rect">
             <a:avLst/>
           </a:prstGeom>
+          <a:noFill/>
+          <a:extLst>
+            <a:ext uri="{909E8E84-426E-40DD-AFC4-6F175D3DCCD1}">
+              <a14:hiddenFill xmlns:a14="http://schemas.microsoft.com/office/drawing/2010/main">
+                <a:solidFill>
+                  <a:srgbClr val="FFFFFF"/>
+                </a:solidFill>
+              </a14:hiddenFill>
+            </a:ext>
+          </a:extLst>
         </p:spPr>
       </p:pic>
-      <p:pic>
-        <p:nvPicPr>
-          <p:cNvPr id="5" name="Inhaltsplatzhalter 4">
-            <a:extLst>
-              <a:ext uri="{FF2B5EF4-FFF2-40B4-BE49-F238E27FC236}">
-                <a16:creationId xmlns:a16="http://schemas.microsoft.com/office/drawing/2014/main" id="{E2DD4F32-0AA1-9CD5-307F-14504A61B46D}"/>
-              </a:ext>
-            </a:extLst>
-          </p:cNvPr>
-          <p:cNvPicPr>
-            <a:picLocks noGrp="1" noChangeAspect="1"/>
-          </p:cNvPicPr>
-          <p:nvPr>
-            <p:ph idx="1"/>
-          </p:nvPr>
-        </p:nvPicPr>
-        <p:blipFill>
-          <a:blip r:embed="rId3"/>
-          <a:stretch>
-            <a:fillRect/>
-          </a:stretch>
-        </p:blipFill>
-        <p:spPr>
-          <a:xfrm>
-            <a:off x="257176" y="1557336"/>
-            <a:ext cx="4122776" cy="2514601"/>
-          </a:xfrm>
-          <a:prstGeom prst="rect">
-            <a:avLst/>
-          </a:prstGeom>
-        </p:spPr>
-      </p:pic>
-      <p:sp>
-        <p:nvSpPr>
-          <p:cNvPr id="6" name="Pfeil nach rechts 5">
-            <a:extLst>
-              <a:ext uri="{FF2B5EF4-FFF2-40B4-BE49-F238E27FC236}">
-                <a16:creationId xmlns:a16="http://schemas.microsoft.com/office/drawing/2014/main" id="{1935E329-8373-ECFD-2D61-930C85D8A5B9}"/>
-              </a:ext>
-            </a:extLst>
-          </p:cNvPr>
-          <p:cNvSpPr/>
-          <p:nvPr/>
-        </p:nvSpPr>
-        <p:spPr>
-          <a:xfrm>
-            <a:off x="4379952" y="2814636"/>
-            <a:ext cx="806411" cy="471489"/>
-          </a:xfrm>
-          <a:prstGeom prst="rightArrow">
-            <a:avLst/>
-          </a:prstGeom>
-        </p:spPr>
-        <p:style>
-          <a:lnRef idx="2">
-            <a:schemeClr val="accent1">
-              <a:shade val="15000"/>
-            </a:schemeClr>
-          </a:lnRef>
-          <a:fillRef idx="1">
-            <a:schemeClr val="accent1"/>
-          </a:fillRef>
-          <a:effectRef idx="0">
-            <a:schemeClr val="accent1"/>
-          </a:effectRef>
-          <a:fontRef idx="minor">
-            <a:schemeClr val="lt1"/>
-          </a:fontRef>
-        </p:style>
-        <p:txBody>
-          <a:bodyPr rtlCol="0" anchor="ctr"/>
-          <a:lstStyle/>
-          <a:p>
-            <a:pPr algn="ctr"/>
-            <a:endParaRPr lang="de-DE"/>
-          </a:p>
-        </p:txBody>
-      </p:sp>
     </p:spTree>
     <p:extLst>
       <p:ext uri="{BB962C8B-B14F-4D97-AF65-F5344CB8AC3E}">
-        <p14:creationId xmlns:p14="http://schemas.microsoft.com/office/powerpoint/2010/main" val="2893547248"/>
+        <p14:creationId xmlns:p14="http://schemas.microsoft.com/office/powerpoint/2010/main" val="49663473"/>
       </p:ext>
     </p:extLst>
   </p:cSld>
@@ -5288,7 +5097,7 @@
           <p:cNvPr id="2" name="Titel 1">
             <a:extLst>
               <a:ext uri="{FF2B5EF4-FFF2-40B4-BE49-F238E27FC236}">
-                <a16:creationId xmlns:a16="http://schemas.microsoft.com/office/drawing/2014/main" id="{14974584-4A76-475C-B234-5E5936D99AD4}"/>
+                <a16:creationId xmlns:a16="http://schemas.microsoft.com/office/drawing/2014/main" id="{2C42AF75-6F11-2614-2269-2AFFB0C3EF2B}"/>
               </a:ext>
             </a:extLst>
           </p:cNvPr>
@@ -5306,7 +5115,7 @@
           <a:p>
             <a:r>
               <a:rPr lang="de-DE" dirty="0"/>
-              <a:t>Zeilenstufenform</a:t>
+              <a:t>Lösung durch den Satz von Gauß</a:t>
             </a:r>
           </a:p>
         </p:txBody>
@@ -5316,7 +5125,7 @@
           <p:cNvPr id="3" name="Datumsplatzhalter 2">
             <a:extLst>
               <a:ext uri="{FF2B5EF4-FFF2-40B4-BE49-F238E27FC236}">
-                <a16:creationId xmlns:a16="http://schemas.microsoft.com/office/drawing/2014/main" id="{29D4C51C-2AAB-1AEE-E3AA-01A9AEC63E97}"/>
+                <a16:creationId xmlns:a16="http://schemas.microsoft.com/office/drawing/2014/main" id="{4181FAE9-F287-D44D-93D7-D979E40CEAAC}"/>
               </a:ext>
             </a:extLst>
           </p:cNvPr>
@@ -5347,7 +5156,7 @@
           <p:cNvPr id="4" name="Fußzeilenplatzhalter 3">
             <a:extLst>
               <a:ext uri="{FF2B5EF4-FFF2-40B4-BE49-F238E27FC236}">
-                <a16:creationId xmlns:a16="http://schemas.microsoft.com/office/drawing/2014/main" id="{ED02E947-5642-CEA9-9727-FC3927C21892}"/>
+                <a16:creationId xmlns:a16="http://schemas.microsoft.com/office/drawing/2014/main" id="{DDA2FE09-3365-426D-99C0-54A94AE62279}"/>
               </a:ext>
             </a:extLst>
           </p:cNvPr>
@@ -5377,7 +5186,7 @@
           <p:cNvPr id="5" name="Foliennummernplatzhalter 4">
             <a:extLst>
               <a:ext uri="{FF2B5EF4-FFF2-40B4-BE49-F238E27FC236}">
-                <a16:creationId xmlns:a16="http://schemas.microsoft.com/office/drawing/2014/main" id="{FF52C6DA-BACF-FFCB-86B9-44FA0E2B0102}"/>
+                <a16:creationId xmlns:a16="http://schemas.microsoft.com/office/drawing/2014/main" id="{D12F1852-2ED4-4F74-7A06-67A3AD20E73F}"/>
               </a:ext>
             </a:extLst>
           </p:cNvPr>
@@ -5405,10 +5214,10 @@
       </p:sp>
       <p:pic>
         <p:nvPicPr>
-          <p:cNvPr id="7" name="Grafik 6">
-            <a:extLst>
-              <a:ext uri="{FF2B5EF4-FFF2-40B4-BE49-F238E27FC236}">
-                <a16:creationId xmlns:a16="http://schemas.microsoft.com/office/drawing/2014/main" id="{D14E2E3C-9AD0-6762-E4EC-81033E148DB0}"/>
+          <p:cNvPr id="6" name="Grafik 5">
+            <a:extLst>
+              <a:ext uri="{FF2B5EF4-FFF2-40B4-BE49-F238E27FC236}">
+                <a16:creationId xmlns:a16="http://schemas.microsoft.com/office/drawing/2014/main" id="{64A106DA-D4B4-18DB-F8F9-0F1A03AE05D6}"/>
               </a:ext>
             </a:extLst>
           </p:cNvPr>
@@ -5425,8 +5234,8 @@
         </p:blipFill>
         <p:spPr>
           <a:xfrm>
-            <a:off x="418579" y="1102158"/>
-            <a:ext cx="5151575" cy="2481263"/>
+            <a:off x="5859764" y="1467719"/>
+            <a:ext cx="5651500" cy="2616200"/>
           </a:xfrm>
           <a:prstGeom prst="rect">
             <a:avLst/>
@@ -5435,10 +5244,10 @@
       </p:pic>
       <p:sp>
         <p:nvSpPr>
-          <p:cNvPr id="8" name="Textfeld 7">
-            <a:extLst>
-              <a:ext uri="{FF2B5EF4-FFF2-40B4-BE49-F238E27FC236}">
-                <a16:creationId xmlns:a16="http://schemas.microsoft.com/office/drawing/2014/main" id="{65C18A34-E79E-3D50-5E18-03B8D2531604}"/>
+          <p:cNvPr id="7" name="Textfeld 6">
+            <a:extLst>
+              <a:ext uri="{FF2B5EF4-FFF2-40B4-BE49-F238E27FC236}">
+                <a16:creationId xmlns:a16="http://schemas.microsoft.com/office/drawing/2014/main" id="{1D163E0A-1AFD-8CDC-6BC9-F43818F68102}"/>
               </a:ext>
             </a:extLst>
           </p:cNvPr>
@@ -5447,8 +5256,8 @@
         </p:nvSpPr>
         <p:spPr>
           <a:xfrm>
-            <a:off x="5786438" y="1275097"/>
-            <a:ext cx="6258188" cy="2308324"/>
+            <a:off x="335264" y="1782928"/>
+            <a:ext cx="5524500" cy="1200329"/>
           </a:xfrm>
           <a:prstGeom prst="rect">
             <a:avLst/>
@@ -5456,76 +5265,35 @@
           <a:noFill/>
         </p:spPr>
         <p:txBody>
-          <a:bodyPr wrap="none" rtlCol="0">
+          <a:bodyPr wrap="square" rtlCol="0">
             <a:spAutoFit/>
           </a:bodyPr>
           <a:lstStyle/>
           <a:p>
             <a:r>
               <a:rPr lang="de-DE" dirty="0"/>
-              <a:t>Gedanklich entspricht das dem Umformen unseres </a:t>
-            </a:r>
+              <a:t>Unser Ziel bei diesem Algorithmus ist es das System auf Zeilenstufenform zu bringen. </a:t>
+            </a:r>
+          </a:p>
+          <a:p>
+            <a:endParaRPr lang="de-DE" dirty="0"/>
           </a:p>
           <a:p>
             <a:r>
               <a:rPr lang="de-DE" dirty="0" err="1"/>
-              <a:t>Gleichungsystems</a:t>
-            </a:r>
-            <a:endParaRPr lang="de-DE" dirty="0"/>
-          </a:p>
-          <a:p>
-            <a:endParaRPr lang="de-DE" dirty="0"/>
-          </a:p>
-          <a:p>
-            <a:pPr marL="285750" indent="-285750">
-              <a:buFont typeface="Arial" panose="020B0604020202020204" pitchFamily="34" charset="0"/>
-              <a:buChar char="•"/>
-            </a:pPr>
+              <a:t>Dannach</a:t>
+            </a:r>
             <a:r>
               <a:rPr lang="de-DE" dirty="0"/>
-              <a:t>System hat keine Lösung wenn b=0, </a:t>
-            </a:r>
-          </a:p>
-          <a:p>
-            <a:pPr marL="285750" indent="-285750">
-              <a:buFont typeface="Arial" panose="020B0604020202020204" pitchFamily="34" charset="0"/>
-              <a:buChar char="•"/>
-            </a:pPr>
-            <a:r>
-              <a:rPr lang="de-DE" dirty="0"/>
-              <a:t>Für Zeilen wo kein Pivot steht erhält man freie Variablen</a:t>
-            </a:r>
-          </a:p>
-          <a:p>
-            <a:pPr marL="285750" indent="-285750">
-              <a:buFont typeface="Arial" panose="020B0604020202020204" pitchFamily="34" charset="0"/>
-              <a:buChar char="•"/>
-            </a:pPr>
-            <a:r>
-              <a:rPr lang="de-DE" dirty="0"/>
-              <a:t>Alle anderen sind gebundene Variablen haben also fixen Wert</a:t>
-            </a:r>
-          </a:p>
-          <a:p>
-            <a:pPr marL="285750" indent="-285750">
-              <a:buFont typeface="Arial" panose="020B0604020202020204" pitchFamily="34" charset="0"/>
-              <a:buChar char="•"/>
-            </a:pPr>
-            <a:endParaRPr lang="de-DE" dirty="0"/>
-          </a:p>
-          <a:p>
-            <a:pPr marL="285750" indent="-285750">
-              <a:buFont typeface="Arial" panose="020B0604020202020204" pitchFamily="34" charset="0"/>
-              <a:buChar char="•"/>
-            </a:pPr>
-            <a:endParaRPr lang="de-DE" dirty="0"/>
+              <a:t> kann man nämlich die Lösung einfach ablesen</a:t>
+            </a:r>
           </a:p>
         </p:txBody>
       </p:sp>
     </p:spTree>
     <p:extLst>
       <p:ext uri="{BB962C8B-B14F-4D97-AF65-F5344CB8AC3E}">
-        <p14:creationId xmlns:p14="http://schemas.microsoft.com/office/powerpoint/2010/main" val="1482528923"/>
+        <p14:creationId xmlns:p14="http://schemas.microsoft.com/office/powerpoint/2010/main" val="667692651"/>
       </p:ext>
     </p:extLst>
   </p:cSld>
@@ -5543,7 +5311,7 @@
         <p:cNvPr id="1" name="">
           <a:extLst>
             <a:ext uri="{FF2B5EF4-FFF2-40B4-BE49-F238E27FC236}">
-              <a16:creationId xmlns:a16="http://schemas.microsoft.com/office/drawing/2014/main" id="{21C426B3-A6E9-BEC5-26AA-E2F22FA96683}"/>
+              <a16:creationId xmlns:a16="http://schemas.microsoft.com/office/drawing/2014/main" id="{04F5FE5D-21B3-1EA4-BEC3-66D95D44ABD1}"/>
             </a:ext>
           </a:extLst>
         </p:cNvPr>
@@ -5563,7 +5331,7 @@
           <p:cNvPr id="2" name="Titel 1">
             <a:extLst>
               <a:ext uri="{FF2B5EF4-FFF2-40B4-BE49-F238E27FC236}">
-                <a16:creationId xmlns:a16="http://schemas.microsoft.com/office/drawing/2014/main" id="{B9040036-07F7-F56C-3C67-437E338A647F}"/>
+                <a16:creationId xmlns:a16="http://schemas.microsoft.com/office/drawing/2014/main" id="{A51FE8C4-17A7-1FD9-9A7B-FFB6CFBB8EDE}"/>
               </a:ext>
             </a:extLst>
           </p:cNvPr>
@@ -5581,7 +5349,7 @@
           <a:p>
             <a:r>
               <a:rPr lang="de-DE" dirty="0"/>
-              <a:t>Lösung</a:t>
+              <a:t>Wiederholung Zeilenstufenform</a:t>
             </a:r>
           </a:p>
         </p:txBody>
@@ -5591,7 +5359,7 @@
           <p:cNvPr id="3" name="Datumsplatzhalter 2">
             <a:extLst>
               <a:ext uri="{FF2B5EF4-FFF2-40B4-BE49-F238E27FC236}">
-                <a16:creationId xmlns:a16="http://schemas.microsoft.com/office/drawing/2014/main" id="{A66EAAF8-3919-B228-BBE5-1C53BC7BCCC5}"/>
+                <a16:creationId xmlns:a16="http://schemas.microsoft.com/office/drawing/2014/main" id="{D11C77C9-13D7-7286-410A-01B0ED2009AD}"/>
               </a:ext>
             </a:extLst>
           </p:cNvPr>
@@ -5622,7 +5390,7 @@
           <p:cNvPr id="4" name="Fußzeilenplatzhalter 3">
             <a:extLst>
               <a:ext uri="{FF2B5EF4-FFF2-40B4-BE49-F238E27FC236}">
-                <a16:creationId xmlns:a16="http://schemas.microsoft.com/office/drawing/2014/main" id="{F5492B23-78E5-7234-B563-1A29AE045751}"/>
+                <a16:creationId xmlns:a16="http://schemas.microsoft.com/office/drawing/2014/main" id="{43FF8E11-0E13-2DF6-E461-2AC2BD626B09}"/>
               </a:ext>
             </a:extLst>
           </p:cNvPr>
@@ -5652,7 +5420,7 @@
           <p:cNvPr id="5" name="Foliennummernplatzhalter 4">
             <a:extLst>
               <a:ext uri="{FF2B5EF4-FFF2-40B4-BE49-F238E27FC236}">
-                <a16:creationId xmlns:a16="http://schemas.microsoft.com/office/drawing/2014/main" id="{CD84FCB4-A78B-6643-6466-E265406DCB89}"/>
+                <a16:creationId xmlns:a16="http://schemas.microsoft.com/office/drawing/2014/main" id="{BA43D1CD-1FAB-C41F-9BB9-2C21E8EF67C0}"/>
               </a:ext>
             </a:extLst>
           </p:cNvPr>
@@ -5680,10 +5448,10 @@
       </p:sp>
       <p:pic>
         <p:nvPicPr>
-          <p:cNvPr id="6" name="Grafik 5">
-            <a:extLst>
-              <a:ext uri="{FF2B5EF4-FFF2-40B4-BE49-F238E27FC236}">
-                <a16:creationId xmlns:a16="http://schemas.microsoft.com/office/drawing/2014/main" id="{0B49F3B0-F2D6-A053-3FAF-4323BE3B2885}"/>
+          <p:cNvPr id="8" name="Grafik 7">
+            <a:extLst>
+              <a:ext uri="{FF2B5EF4-FFF2-40B4-BE49-F238E27FC236}">
+                <a16:creationId xmlns:a16="http://schemas.microsoft.com/office/drawing/2014/main" id="{B8230C63-1200-6261-4024-EE2516AD05DD}"/>
               </a:ext>
             </a:extLst>
           </p:cNvPr>
@@ -5700,18 +5468,257 @@
         </p:blipFill>
         <p:spPr>
           <a:xfrm>
-            <a:off x="878619" y="1039559"/>
-            <a:ext cx="6992635" cy="614737"/>
+            <a:off x="3441700" y="3276515"/>
+            <a:ext cx="5308600" cy="2082800"/>
           </a:xfrm>
           <a:prstGeom prst="rect">
             <a:avLst/>
           </a:prstGeom>
         </p:spPr>
       </p:pic>
+      <p:cxnSp>
+        <p:nvCxnSpPr>
+          <p:cNvPr id="10" name="Gerade Verbindung mit Pfeil 9">
+            <a:extLst>
+              <a:ext uri="{FF2B5EF4-FFF2-40B4-BE49-F238E27FC236}">
+                <a16:creationId xmlns:a16="http://schemas.microsoft.com/office/drawing/2014/main" id="{96A57455-C110-8145-5566-35076E0EB1D5}"/>
+              </a:ext>
+            </a:extLst>
+          </p:cNvPr>
+          <p:cNvCxnSpPr/>
+          <p:nvPr/>
+        </p:nvCxnSpPr>
+        <p:spPr>
+          <a:xfrm>
+            <a:off x="5181343" y="2389537"/>
+            <a:ext cx="0" cy="886978"/>
+          </a:xfrm>
+          <a:prstGeom prst="straightConnector1">
+            <a:avLst/>
+          </a:prstGeom>
+          <a:ln>
+            <a:tailEnd type="triangle"/>
+          </a:ln>
+        </p:spPr>
+        <p:style>
+          <a:lnRef idx="1">
+            <a:schemeClr val="accent1"/>
+          </a:lnRef>
+          <a:fillRef idx="0">
+            <a:schemeClr val="accent1"/>
+          </a:fillRef>
+          <a:effectRef idx="0">
+            <a:schemeClr val="accent1"/>
+          </a:effectRef>
+          <a:fontRef idx="minor">
+            <a:schemeClr val="tx1"/>
+          </a:fontRef>
+        </p:style>
+      </p:cxnSp>
+      <mc:AlternateContent xmlns:mc="http://schemas.openxmlformats.org/markup-compatibility/2006">
+        <mc:Choice xmlns:a14="http://schemas.microsoft.com/office/drawing/2010/main" Requires="a14">
+          <p:sp>
+            <p:nvSpPr>
+              <p:cNvPr id="11" name="Textfeld 10">
+                <a:extLst>
+                  <a:ext uri="{FF2B5EF4-FFF2-40B4-BE49-F238E27FC236}">
+                    <a16:creationId xmlns:a16="http://schemas.microsoft.com/office/drawing/2014/main" id="{B2785FD7-E5AC-0D75-28A2-1AB97888731B}"/>
+                  </a:ext>
+                </a:extLst>
+              </p:cNvPr>
+              <p:cNvSpPr txBox="1"/>
+              <p:nvPr/>
+            </p:nvSpPr>
+            <p:spPr>
+              <a:xfrm>
+                <a:off x="3249827" y="1393003"/>
+                <a:ext cx="4114796" cy="923330"/>
+              </a:xfrm>
+              <a:prstGeom prst="rect">
+                <a:avLst/>
+              </a:prstGeom>
+              <a:noFill/>
+            </p:spPr>
+            <p:txBody>
+              <a:bodyPr wrap="square" rtlCol="0">
+                <a:spAutoFit/>
+              </a:bodyPr>
+              <a:lstStyle/>
+              <a:p>
+                <a:r>
+                  <a:rPr lang="de-DE" dirty="0"/>
+                  <a:t>Pivots, dieses sind unsere gebundenen Variablen </a:t>
+                </a:r>
+                <a14:m>
+                  <m:oMath xmlns:m="http://schemas.openxmlformats.org/officeDocument/2006/math">
+                    <m:sSub>
+                      <m:sSubPr>
+                        <m:ctrlPr>
+                          <a:rPr lang="de-AT" b="0" i="1" smtClean="0">
+                            <a:latin typeface="Cambria Math" panose="02040503050406030204" pitchFamily="18" charset="0"/>
+                          </a:rPr>
+                        </m:ctrlPr>
+                      </m:sSubPr>
+                      <m:e>
+                        <m:r>
+                          <a:rPr lang="de-AT" b="0" i="1" smtClean="0">
+                            <a:latin typeface="Cambria Math" panose="02040503050406030204" pitchFamily="18" charset="0"/>
+                          </a:rPr>
+                          <m:t>𝑥</m:t>
+                        </m:r>
+                      </m:e>
+                      <m:sub>
+                        <m:r>
+                          <a:rPr lang="de-AT" b="0" i="1" smtClean="0">
+                            <a:latin typeface="Cambria Math" panose="02040503050406030204" pitchFamily="18" charset="0"/>
+                          </a:rPr>
+                          <m:t>𝑖</m:t>
+                        </m:r>
+                      </m:sub>
+                    </m:sSub>
+                  </m:oMath>
+                </a14:m>
+                <a:r>
+                  <a:rPr lang="de-DE" dirty="0"/>
+                  <a:t> der Wert ist eindeutig bestimmt</a:t>
+                </a:r>
+              </a:p>
+            </p:txBody>
+          </p:sp>
+        </mc:Choice>
+        <mc:Fallback>
+          <p:sp>
+            <p:nvSpPr>
+              <p:cNvPr id="11" name="Textfeld 10">
+                <a:extLst>
+                  <a:ext uri="{FF2B5EF4-FFF2-40B4-BE49-F238E27FC236}">
+                    <a16:creationId xmlns:a16="http://schemas.microsoft.com/office/drawing/2014/main" id="{B2785FD7-E5AC-0D75-28A2-1AB97888731B}"/>
+                  </a:ext>
+                </a:extLst>
+              </p:cNvPr>
+              <p:cNvSpPr txBox="1">
+                <a:spLocks noRot="1" noChangeAspect="1" noMove="1" noResize="1" noEditPoints="1" noAdjustHandles="1" noChangeArrowheads="1" noChangeShapeType="1" noTextEdit="1"/>
+              </p:cNvSpPr>
+              <p:nvPr/>
+            </p:nvSpPr>
+            <p:spPr>
+              <a:xfrm>
+                <a:off x="3249827" y="1393003"/>
+                <a:ext cx="4114796" cy="923330"/>
+              </a:xfrm>
+              <a:prstGeom prst="rect">
+                <a:avLst/>
+              </a:prstGeom>
+              <a:blipFill>
+                <a:blip r:embed="rId3"/>
+                <a:stretch>
+                  <a:fillRect l="-923" t="-2703" b="-9459"/>
+                </a:stretch>
+              </a:blipFill>
+            </p:spPr>
+            <p:txBody>
+              <a:bodyPr/>
+              <a:lstStyle/>
+              <a:p>
+                <a:r>
+                  <a:rPr lang="de-DE">
+                    <a:noFill/>
+                  </a:rPr>
+                  <a:t> </a:t>
+                </a:r>
+              </a:p>
+            </p:txBody>
+          </p:sp>
+        </mc:Fallback>
+      </mc:AlternateContent>
+      <p:cxnSp>
+        <p:nvCxnSpPr>
+          <p:cNvPr id="12" name="Gerade Verbindung mit Pfeil 11">
+            <a:extLst>
+              <a:ext uri="{FF2B5EF4-FFF2-40B4-BE49-F238E27FC236}">
+                <a16:creationId xmlns:a16="http://schemas.microsoft.com/office/drawing/2014/main" id="{F0E0CC50-FC15-C00C-A2E0-DED6A89DB9CC}"/>
+              </a:ext>
+            </a:extLst>
+          </p:cNvPr>
+          <p:cNvCxnSpPr>
+            <a:cxnSpLocks/>
+          </p:cNvCxnSpPr>
+          <p:nvPr/>
+        </p:nvCxnSpPr>
+        <p:spPr>
+          <a:xfrm flipH="1">
+            <a:off x="5753873" y="2316333"/>
+            <a:ext cx="2228592" cy="1112667"/>
+          </a:xfrm>
+          <a:prstGeom prst="straightConnector1">
+            <a:avLst/>
+          </a:prstGeom>
+          <a:ln>
+            <a:tailEnd type="triangle"/>
+          </a:ln>
+        </p:spPr>
+        <p:style>
+          <a:lnRef idx="1">
+            <a:schemeClr val="accent1"/>
+          </a:lnRef>
+          <a:fillRef idx="0">
+            <a:schemeClr val="accent1"/>
+          </a:fillRef>
+          <a:effectRef idx="0">
+            <a:schemeClr val="accent1"/>
+          </a:effectRef>
+          <a:fontRef idx="minor">
+            <a:schemeClr val="tx1"/>
+          </a:fontRef>
+        </p:style>
+      </p:cxnSp>
+      <p:sp>
+        <p:nvSpPr>
+          <p:cNvPr id="14" name="Textfeld 13">
+            <a:extLst>
+              <a:ext uri="{FF2B5EF4-FFF2-40B4-BE49-F238E27FC236}">
+                <a16:creationId xmlns:a16="http://schemas.microsoft.com/office/drawing/2014/main" id="{D7ECF938-77B3-0ACA-DB83-AD095AC9F82D}"/>
+              </a:ext>
+            </a:extLst>
+          </p:cNvPr>
+          <p:cNvSpPr txBox="1"/>
+          <p:nvPr/>
+        </p:nvSpPr>
+        <p:spPr>
+          <a:xfrm>
+            <a:off x="8130747" y="1807529"/>
+            <a:ext cx="3707027" cy="923330"/>
+          </a:xfrm>
+          <a:prstGeom prst="rect">
+            <a:avLst/>
+          </a:prstGeom>
+          <a:noFill/>
+        </p:spPr>
+        <p:txBody>
+          <a:bodyPr wrap="square" rtlCol="0">
+            <a:spAutoFit/>
+          </a:bodyPr>
+          <a:lstStyle/>
+          <a:p>
+            <a:r>
+              <a:rPr lang="de-DE" dirty="0"/>
+              <a:t>Freie Variablen, welche nicht in </a:t>
+            </a:r>
+            <a:r>
+              <a:rPr lang="de-DE" dirty="0" err="1"/>
+              <a:t>Pivotpositionen</a:t>
+            </a:r>
+            <a:r>
+              <a:rPr lang="de-DE" dirty="0"/>
+              <a:t> stehen, diese können beliebige Werte annehmen</a:t>
+            </a:r>
+          </a:p>
+        </p:txBody>
+      </p:sp>
     </p:spTree>
     <p:extLst>
       <p:ext uri="{BB962C8B-B14F-4D97-AF65-F5344CB8AC3E}">
-        <p14:creationId xmlns:p14="http://schemas.microsoft.com/office/powerpoint/2010/main" val="1554968387"/>
+        <p14:creationId xmlns:p14="http://schemas.microsoft.com/office/powerpoint/2010/main" val="888048442"/>
       </p:ext>
     </p:extLst>
   </p:cSld>
@@ -5722,6 +5729,257 @@
 </file>
 
 <file path=ppt/slides/slide6.xml><?xml version="1.0" encoding="utf-8"?>
+<p:sld xmlns:a="http://schemas.openxmlformats.org/drawingml/2006/main" xmlns:r="http://schemas.openxmlformats.org/officeDocument/2006/relationships" xmlns:p="http://schemas.openxmlformats.org/presentationml/2006/main">
+  <p:cSld>
+    <p:spTree>
+      <p:nvGrpSpPr>
+        <p:cNvPr id="1" name="">
+          <a:extLst>
+            <a:ext uri="{FF2B5EF4-FFF2-40B4-BE49-F238E27FC236}">
+              <a16:creationId xmlns:a16="http://schemas.microsoft.com/office/drawing/2014/main" id="{E2182263-F826-5A02-F01E-197DEE19F25B}"/>
+            </a:ext>
+          </a:extLst>
+        </p:cNvPr>
+        <p:cNvGrpSpPr/>
+        <p:nvPr/>
+      </p:nvGrpSpPr>
+      <p:grpSpPr>
+        <a:xfrm>
+          <a:off x="0" y="0"/>
+          <a:ext cx="0" cy="0"/>
+          <a:chOff x="0" y="0"/>
+          <a:chExt cx="0" cy="0"/>
+        </a:xfrm>
+      </p:grpSpPr>
+      <p:sp>
+        <p:nvSpPr>
+          <p:cNvPr id="2" name="Titel 1">
+            <a:extLst>
+              <a:ext uri="{FF2B5EF4-FFF2-40B4-BE49-F238E27FC236}">
+                <a16:creationId xmlns:a16="http://schemas.microsoft.com/office/drawing/2014/main" id="{F7D0956F-3F6A-1D5A-DB0A-90CBE38C21F8}"/>
+              </a:ext>
+            </a:extLst>
+          </p:cNvPr>
+          <p:cNvSpPr>
+            <a:spLocks noGrp="1"/>
+          </p:cNvSpPr>
+          <p:nvPr>
+            <p:ph type="title"/>
+          </p:nvPr>
+        </p:nvSpPr>
+        <p:spPr/>
+        <p:txBody>
+          <a:bodyPr/>
+          <a:lstStyle/>
+          <a:p>
+            <a:r>
+              <a:rPr lang="de-DE" dirty="0"/>
+              <a:t>Der Algorithmus kurz erklärt</a:t>
+            </a:r>
+          </a:p>
+        </p:txBody>
+      </p:sp>
+      <p:sp>
+        <p:nvSpPr>
+          <p:cNvPr id="3" name="Datumsplatzhalter 2">
+            <a:extLst>
+              <a:ext uri="{FF2B5EF4-FFF2-40B4-BE49-F238E27FC236}">
+                <a16:creationId xmlns:a16="http://schemas.microsoft.com/office/drawing/2014/main" id="{E61C8301-656A-A91A-DE89-DC4BBE3CBE11}"/>
+              </a:ext>
+            </a:extLst>
+          </p:cNvPr>
+          <p:cNvSpPr>
+            <a:spLocks noGrp="1"/>
+          </p:cNvSpPr>
+          <p:nvPr>
+            <p:ph type="dt" sz="half" idx="2"/>
+          </p:nvPr>
+        </p:nvSpPr>
+        <p:spPr/>
+        <p:txBody>
+          <a:bodyPr/>
+          <a:lstStyle/>
+          <a:p>
+            <a:pPr algn="ctr"/>
+            <a:fld id="{7C3CDC0F-71BF-B840-812C-9588125E0BFE}" type="datetime6">
+              <a:rPr lang="de-AT" smtClean="0"/>
+              <a:pPr algn="ctr"/>
+              <a:t>November 24</a:t>
+            </a:fld>
+            <a:endParaRPr lang="de-AT" dirty="0"/>
+          </a:p>
+        </p:txBody>
+      </p:sp>
+      <p:sp>
+        <p:nvSpPr>
+          <p:cNvPr id="4" name="Fußzeilenplatzhalter 3">
+            <a:extLst>
+              <a:ext uri="{FF2B5EF4-FFF2-40B4-BE49-F238E27FC236}">
+                <a16:creationId xmlns:a16="http://schemas.microsoft.com/office/drawing/2014/main" id="{0B4A86D7-951F-A528-AF3E-46E6F037F58B}"/>
+              </a:ext>
+            </a:extLst>
+          </p:cNvPr>
+          <p:cNvSpPr>
+            <a:spLocks noGrp="1"/>
+          </p:cNvSpPr>
+          <p:nvPr>
+            <p:ph type="ftr" sz="quarter" idx="3"/>
+          </p:nvPr>
+        </p:nvSpPr>
+        <p:spPr/>
+        <p:txBody>
+          <a:bodyPr/>
+          <a:lstStyle/>
+          <a:p>
+            <a:pPr algn="ctr"/>
+            <a:r>
+              <a:rPr lang="de-AT"/>
+              <a:t>Titel oder Vortragender</a:t>
+            </a:r>
+            <a:endParaRPr lang="de-AT" dirty="0"/>
+          </a:p>
+        </p:txBody>
+      </p:sp>
+      <p:sp>
+        <p:nvSpPr>
+          <p:cNvPr id="5" name="Foliennummernplatzhalter 4">
+            <a:extLst>
+              <a:ext uri="{FF2B5EF4-FFF2-40B4-BE49-F238E27FC236}">
+                <a16:creationId xmlns:a16="http://schemas.microsoft.com/office/drawing/2014/main" id="{7FAC5E34-3BB4-4FEB-9134-9D5206E80465}"/>
+              </a:ext>
+            </a:extLst>
+          </p:cNvPr>
+          <p:cNvSpPr>
+            <a:spLocks noGrp="1"/>
+          </p:cNvSpPr>
+          <p:nvPr>
+            <p:ph type="sldNum" sz="quarter" idx="4"/>
+          </p:nvPr>
+        </p:nvSpPr>
+        <p:spPr/>
+        <p:txBody>
+          <a:bodyPr/>
+          <a:lstStyle/>
+          <a:p>
+            <a:pPr algn="r"/>
+            <a:fld id="{EBA229B5-7CFD-BC45-B1DD-7E8FA6FF2A01}" type="slidenum">
+              <a:rPr lang="de-AT" smtClean="0"/>
+              <a:pPr algn="r"/>
+              <a:t>6</a:t>
+            </a:fld>
+            <a:endParaRPr lang="de-AT" dirty="0"/>
+          </a:p>
+        </p:txBody>
+      </p:sp>
+      <p:pic>
+        <p:nvPicPr>
+          <p:cNvPr id="6" name="Grafik 5">
+            <a:extLst>
+              <a:ext uri="{FF2B5EF4-FFF2-40B4-BE49-F238E27FC236}">
+                <a16:creationId xmlns:a16="http://schemas.microsoft.com/office/drawing/2014/main" id="{CD5D30B9-2E7A-0CA5-ABB1-A520510E2EA4}"/>
+              </a:ext>
+            </a:extLst>
+          </p:cNvPr>
+          <p:cNvPicPr>
+            <a:picLocks noChangeAspect="1"/>
+          </p:cNvPicPr>
+          <p:nvPr/>
+        </p:nvPicPr>
+        <p:blipFill>
+          <a:blip r:embed="rId2"/>
+          <a:stretch>
+            <a:fillRect/>
+          </a:stretch>
+        </p:blipFill>
+        <p:spPr>
+          <a:xfrm>
+            <a:off x="767408" y="1079328"/>
+            <a:ext cx="10407480" cy="2235372"/>
+          </a:xfrm>
+          <a:prstGeom prst="rect">
+            <a:avLst/>
+          </a:prstGeom>
+        </p:spPr>
+      </p:pic>
+      <p:sp>
+        <p:nvSpPr>
+          <p:cNvPr id="7" name="Textfeld 6">
+            <a:extLst>
+              <a:ext uri="{FF2B5EF4-FFF2-40B4-BE49-F238E27FC236}">
+                <a16:creationId xmlns:a16="http://schemas.microsoft.com/office/drawing/2014/main" id="{00BB4866-E03F-3417-411B-B98B62E61C73}"/>
+              </a:ext>
+            </a:extLst>
+          </p:cNvPr>
+          <p:cNvSpPr txBox="1"/>
+          <p:nvPr/>
+        </p:nvSpPr>
+        <p:spPr>
+          <a:xfrm>
+            <a:off x="740787" y="3409231"/>
+            <a:ext cx="9658734" cy="369332"/>
+          </a:xfrm>
+          <a:prstGeom prst="rect">
+            <a:avLst/>
+          </a:prstGeom>
+          <a:noFill/>
+        </p:spPr>
+        <p:txBody>
+          <a:bodyPr wrap="none" rtlCol="0">
+            <a:spAutoFit/>
+          </a:bodyPr>
+          <a:lstStyle/>
+          <a:p>
+            <a:r>
+              <a:rPr lang="de-DE" dirty="0"/>
+              <a:t>Um unsere Zeilenstufenform zu bekommen können wir also x-beliebige Zeilenoperationen anwenden</a:t>
+            </a:r>
+          </a:p>
+        </p:txBody>
+      </p:sp>
+      <p:pic>
+        <p:nvPicPr>
+          <p:cNvPr id="9" name="Grafik 8">
+            <a:extLst>
+              <a:ext uri="{FF2B5EF4-FFF2-40B4-BE49-F238E27FC236}">
+                <a16:creationId xmlns:a16="http://schemas.microsoft.com/office/drawing/2014/main" id="{259304AD-8F2C-C73C-94D7-A0F447DFFA22}"/>
+              </a:ext>
+            </a:extLst>
+          </p:cNvPr>
+          <p:cNvPicPr>
+            <a:picLocks noChangeAspect="1"/>
+          </p:cNvPicPr>
+          <p:nvPr/>
+        </p:nvPicPr>
+        <p:blipFill>
+          <a:blip r:embed="rId3"/>
+          <a:stretch>
+            <a:fillRect/>
+          </a:stretch>
+        </p:blipFill>
+        <p:spPr>
+          <a:xfrm>
+            <a:off x="767408" y="4027401"/>
+            <a:ext cx="7772400" cy="1616247"/>
+          </a:xfrm>
+          <a:prstGeom prst="rect">
+            <a:avLst/>
+          </a:prstGeom>
+        </p:spPr>
+      </p:pic>
+    </p:spTree>
+    <p:extLst>
+      <p:ext uri="{BB962C8B-B14F-4D97-AF65-F5344CB8AC3E}">
+        <p14:creationId xmlns:p14="http://schemas.microsoft.com/office/powerpoint/2010/main" val="3180278900"/>
+      </p:ext>
+    </p:extLst>
+  </p:cSld>
+  <p:clrMapOvr>
+    <a:masterClrMapping/>
+  </p:clrMapOvr>
+</p:sld>
+</file>
+
+<file path=ppt/slides/slide7.xml><?xml version="1.0" encoding="utf-8"?>
 <p:sld xmlns:a="http://schemas.openxmlformats.org/drawingml/2006/main" xmlns:r="http://schemas.openxmlformats.org/officeDocument/2006/relationships" xmlns:p="http://schemas.openxmlformats.org/presentationml/2006/main">
   <p:cSld>
     <p:spTree>
@@ -5743,7 +6001,7 @@
           <p:cNvPr id="2" name="Titel 1">
             <a:extLst>
               <a:ext uri="{FF2B5EF4-FFF2-40B4-BE49-F238E27FC236}">
-                <a16:creationId xmlns:a16="http://schemas.microsoft.com/office/drawing/2014/main" id="{73777CF5-7C8F-4FC8-0BD9-8A354DBFC57D}"/>
+                <a16:creationId xmlns:a16="http://schemas.microsoft.com/office/drawing/2014/main" id="{6BA89706-4603-63B3-75FD-9E5C228459E7}"/>
               </a:ext>
             </a:extLst>
           </p:cNvPr>
@@ -5761,7 +6019,7 @@
           <a:p>
             <a:r>
               <a:rPr lang="de-DE" dirty="0"/>
-              <a:t>Lösung</a:t>
+              <a:t>Matrixmultiplikation</a:t>
             </a:r>
           </a:p>
         </p:txBody>
@@ -5771,7 +6029,7 @@
           <p:cNvPr id="3" name="Datumsplatzhalter 2">
             <a:extLst>
               <a:ext uri="{FF2B5EF4-FFF2-40B4-BE49-F238E27FC236}">
-                <a16:creationId xmlns:a16="http://schemas.microsoft.com/office/drawing/2014/main" id="{C084672B-BEBA-1606-5C8A-6E7F7DB4E2EB}"/>
+                <a16:creationId xmlns:a16="http://schemas.microsoft.com/office/drawing/2014/main" id="{A60ECFAB-D68E-8C09-842D-17337ECD76ED}"/>
               </a:ext>
             </a:extLst>
           </p:cNvPr>
@@ -5802,7 +6060,7 @@
           <p:cNvPr id="4" name="Fußzeilenplatzhalter 3">
             <a:extLst>
               <a:ext uri="{FF2B5EF4-FFF2-40B4-BE49-F238E27FC236}">
-                <a16:creationId xmlns:a16="http://schemas.microsoft.com/office/drawing/2014/main" id="{52CADCA3-D2A8-D8DD-054D-D39F4D49D54C}"/>
+                <a16:creationId xmlns:a16="http://schemas.microsoft.com/office/drawing/2014/main" id="{44FF055A-798F-1AD0-4ACC-B02FFB8482FD}"/>
               </a:ext>
             </a:extLst>
           </p:cNvPr>
@@ -5832,7 +6090,7 @@
           <p:cNvPr id="5" name="Foliennummernplatzhalter 4">
             <a:extLst>
               <a:ext uri="{FF2B5EF4-FFF2-40B4-BE49-F238E27FC236}">
-                <a16:creationId xmlns:a16="http://schemas.microsoft.com/office/drawing/2014/main" id="{EFC57B1B-8BA5-746F-8AA7-5B5E2BE542D4}"/>
+                <a16:creationId xmlns:a16="http://schemas.microsoft.com/office/drawing/2014/main" id="{33F6B80B-4E0A-3CEF-E5EE-BFDD447BA932}"/>
               </a:ext>
             </a:extLst>
           </p:cNvPr>
@@ -5852,18 +6110,65 @@
             <a:fld id="{EBA229B5-7CFD-BC45-B1DD-7E8FA6FF2A01}" type="slidenum">
               <a:rPr lang="de-AT" smtClean="0"/>
               <a:pPr algn="r"/>
-              <a:t>6</a:t>
+              <a:t>7</a:t>
             </a:fld>
             <a:endParaRPr lang="de-AT" dirty="0"/>
           </a:p>
         </p:txBody>
       </p:sp>
+      <p:pic>
+        <p:nvPicPr>
+          <p:cNvPr id="3074" name="Picture 2" descr="undefined">
+            <a:extLst>
+              <a:ext uri="{FF2B5EF4-FFF2-40B4-BE49-F238E27FC236}">
+                <a16:creationId xmlns:a16="http://schemas.microsoft.com/office/drawing/2014/main" id="{7C327B36-D57F-53C6-302F-DECF189D608C}"/>
+              </a:ext>
+            </a:extLst>
+          </p:cNvPr>
+          <p:cNvPicPr>
+            <a:picLocks noChangeAspect="1" noChangeArrowheads="1"/>
+          </p:cNvPicPr>
+          <p:nvPr/>
+        </p:nvPicPr>
+        <p:blipFill>
+          <a:blip r:embed="rId2">
+            <a:extLst>
+              <a:ext uri="{28A0092B-C50C-407E-A947-70E740481C1C}">
+                <a14:useLocalDpi xmlns:a14="http://schemas.microsoft.com/office/drawing/2010/main" val="0"/>
+              </a:ext>
+            </a:extLst>
+          </a:blip>
+          <a:srcRect/>
+          <a:stretch>
+            <a:fillRect/>
+          </a:stretch>
+        </p:blipFill>
+        <p:spPr bwMode="auto">
+          <a:xfrm>
+            <a:off x="541561" y="959100"/>
+            <a:ext cx="4372637" cy="2469900"/>
+          </a:xfrm>
+          <a:prstGeom prst="rect">
+            <a:avLst/>
+          </a:prstGeom>
+          <a:noFill/>
+          <a:extLst>
+            <a:ext uri="{909E8E84-426E-40DD-AFC4-6F175D3DCCD1}">
+              <a14:hiddenFill xmlns:a14="http://schemas.microsoft.com/office/drawing/2010/main">
+                <a:solidFill>
+                  <a:srgbClr val="FFFFFF"/>
+                </a:solidFill>
+              </a14:hiddenFill>
+            </a:ext>
+          </a:extLst>
+        </p:spPr>
+      </p:pic>
       <p:pic>
         <p:nvPicPr>
           <p:cNvPr id="6" name="Grafik 5">
             <a:extLst>
               <a:ext uri="{FF2B5EF4-FFF2-40B4-BE49-F238E27FC236}">
-                <a16:creationId xmlns:a16="http://schemas.microsoft.com/office/drawing/2014/main" id="{2B880AFB-ABCF-8FDD-8780-AEE7F99A24D3}"/>
+                <a16:creationId xmlns:a16="http://schemas.microsoft.com/office/drawing/2014/main" id="{420263B8-74BB-B3F7-FE8A-E0E57164B1A4}"/>
               </a:ext>
             </a:extLst>
           </p:cNvPr>
@@ -5873,66 +6178,26 @@
           <p:nvPr/>
         </p:nvPicPr>
         <p:blipFill>
-          <a:blip r:embed="rId2"/>
-          <a:stretch>
-            <a:fillRect/>
-          </a:stretch>
+          <a:blip r:embed="rId3"/>
+          <a:srcRect t="6537"/>
+          <a:stretch/>
         </p:blipFill>
         <p:spPr>
           <a:xfrm>
-            <a:off x="878619" y="1039559"/>
-            <a:ext cx="6992635" cy="614737"/>
+            <a:off x="117088" y="3747244"/>
+            <a:ext cx="6083300" cy="2290862"/>
           </a:xfrm>
           <a:prstGeom prst="rect">
             <a:avLst/>
           </a:prstGeom>
         </p:spPr>
       </p:pic>
-      <p:cxnSp>
-        <p:nvCxnSpPr>
-          <p:cNvPr id="11" name="Gerade Verbindung mit Pfeil 10">
-            <a:extLst>
-              <a:ext uri="{FF2B5EF4-FFF2-40B4-BE49-F238E27FC236}">
-                <a16:creationId xmlns:a16="http://schemas.microsoft.com/office/drawing/2014/main" id="{C1A59AAC-04FE-44F6-CD85-CA5CCB4B72D6}"/>
-              </a:ext>
-            </a:extLst>
-          </p:cNvPr>
-          <p:cNvCxnSpPr/>
-          <p:nvPr/>
-        </p:nvCxnSpPr>
-        <p:spPr>
-          <a:xfrm flipH="1">
-            <a:off x="1729946" y="1519881"/>
-            <a:ext cx="753762" cy="1742303"/>
-          </a:xfrm>
-          <a:prstGeom prst="straightConnector1">
-            <a:avLst/>
-          </a:prstGeom>
-          <a:ln>
-            <a:tailEnd type="triangle"/>
-          </a:ln>
-        </p:spPr>
-        <p:style>
-          <a:lnRef idx="1">
-            <a:schemeClr val="accent1"/>
-          </a:lnRef>
-          <a:fillRef idx="0">
-            <a:schemeClr val="accent1"/>
-          </a:fillRef>
-          <a:effectRef idx="0">
-            <a:schemeClr val="accent1"/>
-          </a:effectRef>
-          <a:fontRef idx="minor">
-            <a:schemeClr val="tx1"/>
-          </a:fontRef>
-        </p:style>
-      </p:cxnSp>
-      <p:sp>
-        <p:nvSpPr>
-          <p:cNvPr id="12" name="Textfeld 11">
-            <a:extLst>
-              <a:ext uri="{FF2B5EF4-FFF2-40B4-BE49-F238E27FC236}">
-                <a16:creationId xmlns:a16="http://schemas.microsoft.com/office/drawing/2014/main" id="{5365FE35-BB88-7ECD-3665-17F60E4EEFC3}"/>
+      <p:sp>
+        <p:nvSpPr>
+          <p:cNvPr id="7" name="Textfeld 6">
+            <a:extLst>
+              <a:ext uri="{FF2B5EF4-FFF2-40B4-BE49-F238E27FC236}">
+                <a16:creationId xmlns:a16="http://schemas.microsoft.com/office/drawing/2014/main" id="{A89D50DA-5715-A8D7-9923-ECED5169EB08}"/>
               </a:ext>
             </a:extLst>
           </p:cNvPr>
@@ -5941,8 +6206,8 @@
         </p:nvSpPr>
         <p:spPr>
           <a:xfrm>
-            <a:off x="1382671" y="3280719"/>
-            <a:ext cx="694549" cy="369332"/>
+            <a:off x="6858000" y="985838"/>
+            <a:ext cx="4586288" cy="1477328"/>
           </a:xfrm>
           <a:prstGeom prst="rect">
             <a:avLst/>
@@ -5950,14 +6215,23 @@
           <a:noFill/>
         </p:spPr>
         <p:txBody>
-          <a:bodyPr wrap="none" rtlCol="0">
+          <a:bodyPr wrap="square" rtlCol="0">
             <a:spAutoFit/>
           </a:bodyPr>
           <a:lstStyle/>
           <a:p>
             <a:r>
               <a:rPr lang="de-DE" dirty="0"/>
-              <a:t>Tupel</a:t>
+              <a:t>Wir merken uns dass für hier die Dimensionen passen müssen:</a:t>
+            </a:r>
+          </a:p>
+          <a:p>
+            <a:endParaRPr lang="de-DE" dirty="0"/>
+          </a:p>
+          <a:p>
+            <a:r>
+              <a:rPr lang="de-DE" b="1" dirty="0"/>
+              <a:t>Die Anzahl der Spalten von A muss mit der Anzahl der Zeilen von B übereinstimmen!</a:t>
             </a:r>
           </a:p>
         </p:txBody>
@@ -5965,7 +6239,7 @@
     </p:spTree>
     <p:extLst>
       <p:ext uri="{BB962C8B-B14F-4D97-AF65-F5344CB8AC3E}">
-        <p14:creationId xmlns:p14="http://schemas.microsoft.com/office/powerpoint/2010/main" val="103432825"/>
+        <p14:creationId xmlns:p14="http://schemas.microsoft.com/office/powerpoint/2010/main" val="3319346581"/>
       </p:ext>
     </p:extLst>
   </p:cSld>
@@ -5975,7 +6249,7 @@
 </p:sld>
 </file>
 
-<file path=ppt/slides/slide7.xml><?xml version="1.0" encoding="utf-8"?>
+<file path=ppt/slides/slide8.xml><?xml version="1.0" encoding="utf-8"?>
 <p:sld xmlns:a="http://schemas.openxmlformats.org/drawingml/2006/main" xmlns:r="http://schemas.openxmlformats.org/officeDocument/2006/relationships" xmlns:p="http://schemas.openxmlformats.org/presentationml/2006/main">
   <p:cSld>
     <p:spTree>
@@ -5983,7 +6257,7 @@
         <p:cNvPr id="1" name="">
           <a:extLst>
             <a:ext uri="{FF2B5EF4-FFF2-40B4-BE49-F238E27FC236}">
-              <a16:creationId xmlns:a16="http://schemas.microsoft.com/office/drawing/2014/main" id="{4911179F-E86B-5361-87BE-FE75F9794883}"/>
+              <a16:creationId xmlns:a16="http://schemas.microsoft.com/office/drawing/2014/main" id="{B1792234-2779-DF11-38AB-A22EAB6A3B37}"/>
             </a:ext>
           </a:extLst>
         </p:cNvPr>
@@ -6003,7 +6277,7 @@
           <p:cNvPr id="2" name="Titel 1">
             <a:extLst>
               <a:ext uri="{FF2B5EF4-FFF2-40B4-BE49-F238E27FC236}">
-                <a16:creationId xmlns:a16="http://schemas.microsoft.com/office/drawing/2014/main" id="{2A84C248-5BFD-1622-2417-B157F9D6042F}"/>
+                <a16:creationId xmlns:a16="http://schemas.microsoft.com/office/drawing/2014/main" id="{1088377E-D92B-3C3A-937F-50CB7C18A876}"/>
               </a:ext>
             </a:extLst>
           </p:cNvPr>
@@ -6021,7 +6295,7 @@
           <a:p>
             <a:r>
               <a:rPr lang="de-DE" dirty="0"/>
-              <a:t>Lösung</a:t>
+              <a:t>Matrixmultiplikation der Algorithmus</a:t>
             </a:r>
           </a:p>
         </p:txBody>
@@ -6031,7 +6305,7 @@
           <p:cNvPr id="3" name="Datumsplatzhalter 2">
             <a:extLst>
               <a:ext uri="{FF2B5EF4-FFF2-40B4-BE49-F238E27FC236}">
-                <a16:creationId xmlns:a16="http://schemas.microsoft.com/office/drawing/2014/main" id="{981041A1-9110-BC55-9AE9-229F1D03E7E4}"/>
+                <a16:creationId xmlns:a16="http://schemas.microsoft.com/office/drawing/2014/main" id="{D70FF85E-86BF-FE58-FB9D-0BEC081C0E0C}"/>
               </a:ext>
             </a:extLst>
           </p:cNvPr>
@@ -6062,7 +6336,7 @@
           <p:cNvPr id="4" name="Fußzeilenplatzhalter 3">
             <a:extLst>
               <a:ext uri="{FF2B5EF4-FFF2-40B4-BE49-F238E27FC236}">
-                <a16:creationId xmlns:a16="http://schemas.microsoft.com/office/drawing/2014/main" id="{FA0EC010-49F2-106D-AE2F-0725B212C9BC}"/>
+                <a16:creationId xmlns:a16="http://schemas.microsoft.com/office/drawing/2014/main" id="{FC7587AA-7247-3490-C93A-24513C43CE97}"/>
               </a:ext>
             </a:extLst>
           </p:cNvPr>
@@ -6092,345 +6366,7 @@
           <p:cNvPr id="5" name="Foliennummernplatzhalter 4">
             <a:extLst>
               <a:ext uri="{FF2B5EF4-FFF2-40B4-BE49-F238E27FC236}">
-                <a16:creationId xmlns:a16="http://schemas.microsoft.com/office/drawing/2014/main" id="{5A017CE4-271E-D5AA-C60E-F1503154C677}"/>
-              </a:ext>
-            </a:extLst>
-          </p:cNvPr>
-          <p:cNvSpPr>
-            <a:spLocks noGrp="1"/>
-          </p:cNvSpPr>
-          <p:nvPr>
-            <p:ph type="sldNum" sz="quarter" idx="4"/>
-          </p:nvPr>
-        </p:nvSpPr>
-        <p:spPr/>
-        <p:txBody>
-          <a:bodyPr/>
-          <a:lstStyle/>
-          <a:p>
-            <a:pPr algn="r"/>
-            <a:fld id="{EBA229B5-7CFD-BC45-B1DD-7E8FA6FF2A01}" type="slidenum">
-              <a:rPr lang="de-AT" smtClean="0"/>
-              <a:pPr algn="r"/>
-              <a:t>7</a:t>
-            </a:fld>
-            <a:endParaRPr lang="de-AT" dirty="0"/>
-          </a:p>
-        </p:txBody>
-      </p:sp>
-      <p:pic>
-        <p:nvPicPr>
-          <p:cNvPr id="6" name="Grafik 5">
-            <a:extLst>
-              <a:ext uri="{FF2B5EF4-FFF2-40B4-BE49-F238E27FC236}">
-                <a16:creationId xmlns:a16="http://schemas.microsoft.com/office/drawing/2014/main" id="{F615A675-9F20-B784-2FFC-39DF81DA6FCB}"/>
-              </a:ext>
-            </a:extLst>
-          </p:cNvPr>
-          <p:cNvPicPr>
-            <a:picLocks noChangeAspect="1"/>
-          </p:cNvPicPr>
-          <p:nvPr/>
-        </p:nvPicPr>
-        <p:blipFill>
-          <a:blip r:embed="rId2"/>
-          <a:stretch>
-            <a:fillRect/>
-          </a:stretch>
-        </p:blipFill>
-        <p:spPr>
-          <a:xfrm>
-            <a:off x="878619" y="1039559"/>
-            <a:ext cx="6992635" cy="614737"/>
-          </a:xfrm>
-          <a:prstGeom prst="rect">
-            <a:avLst/>
-          </a:prstGeom>
-        </p:spPr>
-      </p:pic>
-      <p:cxnSp>
-        <p:nvCxnSpPr>
-          <p:cNvPr id="11" name="Gerade Verbindung mit Pfeil 10">
-            <a:extLst>
-              <a:ext uri="{FF2B5EF4-FFF2-40B4-BE49-F238E27FC236}">
-                <a16:creationId xmlns:a16="http://schemas.microsoft.com/office/drawing/2014/main" id="{918E3548-6CFC-4AA7-CBBE-A873E255A6F2}"/>
-              </a:ext>
-            </a:extLst>
-          </p:cNvPr>
-          <p:cNvCxnSpPr/>
-          <p:nvPr/>
-        </p:nvCxnSpPr>
-        <p:spPr>
-          <a:xfrm flipH="1">
-            <a:off x="1729946" y="1519881"/>
-            <a:ext cx="753762" cy="1742303"/>
-          </a:xfrm>
-          <a:prstGeom prst="straightConnector1">
-            <a:avLst/>
-          </a:prstGeom>
-          <a:ln>
-            <a:tailEnd type="triangle"/>
-          </a:ln>
-        </p:spPr>
-        <p:style>
-          <a:lnRef idx="1">
-            <a:schemeClr val="accent1"/>
-          </a:lnRef>
-          <a:fillRef idx="0">
-            <a:schemeClr val="accent1"/>
-          </a:fillRef>
-          <a:effectRef idx="0">
-            <a:schemeClr val="accent1"/>
-          </a:effectRef>
-          <a:fontRef idx="minor">
-            <a:schemeClr val="tx1"/>
-          </a:fontRef>
-        </p:style>
-      </p:cxnSp>
-      <p:sp>
-        <p:nvSpPr>
-          <p:cNvPr id="12" name="Textfeld 11">
-            <a:extLst>
-              <a:ext uri="{FF2B5EF4-FFF2-40B4-BE49-F238E27FC236}">
-                <a16:creationId xmlns:a16="http://schemas.microsoft.com/office/drawing/2014/main" id="{56E0963E-CF88-107C-34E3-5EEBFC5EF55D}"/>
-              </a:ext>
-            </a:extLst>
-          </p:cNvPr>
-          <p:cNvSpPr txBox="1"/>
-          <p:nvPr/>
-        </p:nvSpPr>
-        <p:spPr>
-          <a:xfrm>
-            <a:off x="1382671" y="3280719"/>
-            <a:ext cx="694549" cy="369332"/>
-          </a:xfrm>
-          <a:prstGeom prst="rect">
-            <a:avLst/>
-          </a:prstGeom>
-          <a:noFill/>
-        </p:spPr>
-        <p:txBody>
-          <a:bodyPr wrap="none" rtlCol="0">
-            <a:spAutoFit/>
-          </a:bodyPr>
-          <a:lstStyle/>
-          <a:p>
-            <a:r>
-              <a:rPr lang="de-DE" dirty="0"/>
-              <a:t>Tupel</a:t>
-            </a:r>
-          </a:p>
-        </p:txBody>
-      </p:sp>
-      <p:cxnSp>
-        <p:nvCxnSpPr>
-          <p:cNvPr id="7" name="Gerade Verbindung mit Pfeil 6">
-            <a:extLst>
-              <a:ext uri="{FF2B5EF4-FFF2-40B4-BE49-F238E27FC236}">
-                <a16:creationId xmlns:a16="http://schemas.microsoft.com/office/drawing/2014/main" id="{957A2852-75AE-36B4-32B3-B40CFECE2EED}"/>
-              </a:ext>
-            </a:extLst>
-          </p:cNvPr>
-          <p:cNvCxnSpPr>
-            <a:cxnSpLocks/>
-          </p:cNvCxnSpPr>
-          <p:nvPr/>
-        </p:nvCxnSpPr>
-        <p:spPr>
-          <a:xfrm flipH="1">
-            <a:off x="4213654" y="1519881"/>
-            <a:ext cx="567121" cy="1909119"/>
-          </a:xfrm>
-          <a:prstGeom prst="straightConnector1">
-            <a:avLst/>
-          </a:prstGeom>
-          <a:ln>
-            <a:tailEnd type="triangle"/>
-          </a:ln>
-        </p:spPr>
-        <p:style>
-          <a:lnRef idx="1">
-            <a:schemeClr val="accent1"/>
-          </a:lnRef>
-          <a:fillRef idx="0">
-            <a:schemeClr val="accent1"/>
-          </a:fillRef>
-          <a:effectRef idx="0">
-            <a:schemeClr val="accent1"/>
-          </a:effectRef>
-          <a:fontRef idx="minor">
-            <a:schemeClr val="tx1"/>
-          </a:fontRef>
-        </p:style>
-      </p:cxnSp>
-      <p:sp>
-        <p:nvSpPr>
-          <p:cNvPr id="10" name="Textfeld 9">
-            <a:extLst>
-              <a:ext uri="{FF2B5EF4-FFF2-40B4-BE49-F238E27FC236}">
-                <a16:creationId xmlns:a16="http://schemas.microsoft.com/office/drawing/2014/main" id="{0E22532D-2BEE-8934-75E4-45AA35CF7D0B}"/>
-              </a:ext>
-            </a:extLst>
-          </p:cNvPr>
-          <p:cNvSpPr txBox="1"/>
-          <p:nvPr/>
-        </p:nvSpPr>
-        <p:spPr>
-          <a:xfrm>
-            <a:off x="3311611" y="3421451"/>
-            <a:ext cx="3648178" cy="369332"/>
-          </a:xfrm>
-          <a:prstGeom prst="rect">
-            <a:avLst/>
-          </a:prstGeom>
-          <a:noFill/>
-        </p:spPr>
-        <p:txBody>
-          <a:bodyPr wrap="none" rtlCol="0">
-            <a:spAutoFit/>
-          </a:bodyPr>
-          <a:lstStyle/>
-          <a:p>
-            <a:r>
-              <a:rPr lang="de-DE" dirty="0"/>
-              <a:t>... welche das </a:t>
-            </a:r>
-            <a:r>
-              <a:rPr lang="de-DE" dirty="0" err="1"/>
-              <a:t>Gleichungsystem</a:t>
-            </a:r>
-            <a:r>
-              <a:rPr lang="de-DE" dirty="0"/>
-              <a:t> lösen</a:t>
-            </a:r>
-          </a:p>
-        </p:txBody>
-      </p:sp>
-    </p:spTree>
-    <p:extLst>
-      <p:ext uri="{BB962C8B-B14F-4D97-AF65-F5344CB8AC3E}">
-        <p14:creationId xmlns:p14="http://schemas.microsoft.com/office/powerpoint/2010/main" val="2004450789"/>
-      </p:ext>
-    </p:extLst>
-  </p:cSld>
-  <p:clrMapOvr>
-    <a:masterClrMapping/>
-  </p:clrMapOvr>
-</p:sld>
-</file>
-
-<file path=ppt/slides/slide8.xml><?xml version="1.0" encoding="utf-8"?>
-<p:sld xmlns:a="http://schemas.openxmlformats.org/drawingml/2006/main" xmlns:r="http://schemas.openxmlformats.org/officeDocument/2006/relationships" xmlns:p="http://schemas.openxmlformats.org/presentationml/2006/main">
-  <p:cSld>
-    <p:spTree>
-      <p:nvGrpSpPr>
-        <p:cNvPr id="1" name=""/>
-        <p:cNvGrpSpPr/>
-        <p:nvPr/>
-      </p:nvGrpSpPr>
-      <p:grpSpPr>
-        <a:xfrm>
-          <a:off x="0" y="0"/>
-          <a:ext cx="0" cy="0"/>
-          <a:chOff x="0" y="0"/>
-          <a:chExt cx="0" cy="0"/>
-        </a:xfrm>
-      </p:grpSpPr>
-      <p:sp>
-        <p:nvSpPr>
-          <p:cNvPr id="2" name="Titel 1">
-            <a:extLst>
-              <a:ext uri="{FF2B5EF4-FFF2-40B4-BE49-F238E27FC236}">
-                <a16:creationId xmlns:a16="http://schemas.microsoft.com/office/drawing/2014/main" id="{2E5A173C-EB70-FB54-C1A3-8B21A9F9EEF9}"/>
-              </a:ext>
-            </a:extLst>
-          </p:cNvPr>
-          <p:cNvSpPr>
-            <a:spLocks noGrp="1"/>
-          </p:cNvSpPr>
-          <p:nvPr>
-            <p:ph type="title"/>
-          </p:nvPr>
-        </p:nvSpPr>
-        <p:spPr/>
-        <p:txBody>
-          <a:bodyPr/>
-          <a:lstStyle/>
-          <a:p>
-            <a:r>
-              <a:rPr lang="de-DE" dirty="0"/>
-              <a:t>Beispiel ablesen der Lösung</a:t>
-            </a:r>
-          </a:p>
-        </p:txBody>
-      </p:sp>
-      <p:sp>
-        <p:nvSpPr>
-          <p:cNvPr id="3" name="Datumsplatzhalter 2">
-            <a:extLst>
-              <a:ext uri="{FF2B5EF4-FFF2-40B4-BE49-F238E27FC236}">
-                <a16:creationId xmlns:a16="http://schemas.microsoft.com/office/drawing/2014/main" id="{8A94CB5F-7AE2-880C-EDE6-7E722E4BCBCF}"/>
-              </a:ext>
-            </a:extLst>
-          </p:cNvPr>
-          <p:cNvSpPr>
-            <a:spLocks noGrp="1"/>
-          </p:cNvSpPr>
-          <p:nvPr>
-            <p:ph type="dt" sz="half" idx="2"/>
-          </p:nvPr>
-        </p:nvSpPr>
-        <p:spPr/>
-        <p:txBody>
-          <a:bodyPr/>
-          <a:lstStyle/>
-          <a:p>
-            <a:pPr algn="ctr"/>
-            <a:fld id="{7C3CDC0F-71BF-B840-812C-9588125E0BFE}" type="datetime6">
-              <a:rPr lang="de-AT" smtClean="0"/>
-              <a:pPr algn="ctr"/>
-              <a:t>November 24</a:t>
-            </a:fld>
-            <a:endParaRPr lang="de-AT" dirty="0"/>
-          </a:p>
-        </p:txBody>
-      </p:sp>
-      <p:sp>
-        <p:nvSpPr>
-          <p:cNvPr id="4" name="Fußzeilenplatzhalter 3">
-            <a:extLst>
-              <a:ext uri="{FF2B5EF4-FFF2-40B4-BE49-F238E27FC236}">
-                <a16:creationId xmlns:a16="http://schemas.microsoft.com/office/drawing/2014/main" id="{BC173926-A642-8CC7-8AD3-42408996B82E}"/>
-              </a:ext>
-            </a:extLst>
-          </p:cNvPr>
-          <p:cNvSpPr>
-            <a:spLocks noGrp="1"/>
-          </p:cNvSpPr>
-          <p:nvPr>
-            <p:ph type="ftr" sz="quarter" idx="3"/>
-          </p:nvPr>
-        </p:nvSpPr>
-        <p:spPr/>
-        <p:txBody>
-          <a:bodyPr/>
-          <a:lstStyle/>
-          <a:p>
-            <a:pPr algn="ctr"/>
-            <a:r>
-              <a:rPr lang="de-AT"/>
-              <a:t>Titel oder Vortragender</a:t>
-            </a:r>
-            <a:endParaRPr lang="de-AT" dirty="0"/>
-          </a:p>
-        </p:txBody>
-      </p:sp>
-      <p:sp>
-        <p:nvSpPr>
-          <p:cNvPr id="5" name="Foliennummernplatzhalter 4">
-            <a:extLst>
-              <a:ext uri="{FF2B5EF4-FFF2-40B4-BE49-F238E27FC236}">
-                <a16:creationId xmlns:a16="http://schemas.microsoft.com/office/drawing/2014/main" id="{4BCA790D-AED6-0CB5-CE1A-A0B1AC29EEEC}"/>
+                <a16:creationId xmlns:a16="http://schemas.microsoft.com/office/drawing/2014/main" id="{EFB2BAEC-1FED-5365-7109-AA1BCCEC8D6C}"/>
               </a:ext>
             </a:extLst>
           </p:cNvPr>
@@ -6458,37 +6394,55 @@
       </p:sp>
       <p:pic>
         <p:nvPicPr>
-          <p:cNvPr id="6" name="Grafik 5">
-            <a:extLst>
-              <a:ext uri="{FF2B5EF4-FFF2-40B4-BE49-F238E27FC236}">
-                <a16:creationId xmlns:a16="http://schemas.microsoft.com/office/drawing/2014/main" id="{951D40A7-C19D-1561-305A-4305F38B23C6}"/>
+          <p:cNvPr id="4098" name="Picture 2" descr="undefined">
+            <a:extLst>
+              <a:ext uri="{FF2B5EF4-FFF2-40B4-BE49-F238E27FC236}">
+                <a16:creationId xmlns:a16="http://schemas.microsoft.com/office/drawing/2014/main" id="{ACF6D5D6-C24A-107B-5BAE-B7A748F39055}"/>
               </a:ext>
             </a:extLst>
           </p:cNvPr>
           <p:cNvPicPr>
-            <a:picLocks noChangeAspect="1"/>
+            <a:picLocks noChangeAspect="1" noChangeArrowheads="1"/>
           </p:cNvPicPr>
           <p:nvPr/>
         </p:nvPicPr>
         <p:blipFill>
-          <a:blip r:embed="rId2"/>
-          <a:srcRect t="1467"/>
-          <a:stretch/>
+          <a:blip r:embed="rId2">
+            <a:extLst>
+              <a:ext uri="{28A0092B-C50C-407E-A947-70E740481C1C}">
+                <a14:useLocalDpi xmlns:a14="http://schemas.microsoft.com/office/drawing/2010/main" val="0"/>
+              </a:ext>
+            </a:extLst>
+          </a:blip>
+          <a:srcRect/>
+          <a:stretch>
+            <a:fillRect/>
+          </a:stretch>
         </p:blipFill>
-        <p:spPr>
-          <a:xfrm>
-            <a:off x="436561" y="985838"/>
-            <a:ext cx="7003943" cy="5013431"/>
+        <p:spPr bwMode="auto">
+          <a:xfrm>
+            <a:off x="767408" y="682750"/>
+            <a:ext cx="9778574" cy="5049717"/>
           </a:xfrm>
           <a:prstGeom prst="rect">
             <a:avLst/>
           </a:prstGeom>
+          <a:noFill/>
+          <a:extLst>
+            <a:ext uri="{909E8E84-426E-40DD-AFC4-6F175D3DCCD1}">
+              <a14:hiddenFill xmlns:a14="http://schemas.microsoft.com/office/drawing/2010/main">
+                <a:solidFill>
+                  <a:srgbClr val="FFFFFF"/>
+                </a:solidFill>
+              </a14:hiddenFill>
+            </a:ext>
+          </a:extLst>
         </p:spPr>
       </p:pic>
     </p:spTree>
     <p:extLst>
       <p:ext uri="{BB962C8B-B14F-4D97-AF65-F5344CB8AC3E}">
-        <p14:creationId xmlns:p14="http://schemas.microsoft.com/office/powerpoint/2010/main" val="205005682"/>
+        <p14:creationId xmlns:p14="http://schemas.microsoft.com/office/powerpoint/2010/main" val="1707230568"/>
       </p:ext>
     </p:extLst>
   </p:cSld>
@@ -6520,7 +6474,7 @@
           <p:cNvPr id="2" name="Titel 1">
             <a:extLst>
               <a:ext uri="{FF2B5EF4-FFF2-40B4-BE49-F238E27FC236}">
-                <a16:creationId xmlns:a16="http://schemas.microsoft.com/office/drawing/2014/main" id="{2920EFB0-2F5B-E5A7-6654-08938B5D125C}"/>
+                <a16:creationId xmlns:a16="http://schemas.microsoft.com/office/drawing/2014/main" id="{5C630334-18DC-3666-7FC4-158971EC773D}"/>
               </a:ext>
             </a:extLst>
           </p:cNvPr>
@@ -6536,15 +6490,7 @@
           <a:bodyPr/>
           <a:lstStyle/>
           <a:p>
-            <a:r>
-              <a:rPr lang="de-DE" dirty="0"/>
-              <a:t>Wiederholung Satz von </a:t>
-            </a:r>
-            <a:r>
-              <a:rPr lang="de-DE" dirty="0" err="1"/>
-              <a:t>Gauss</a:t>
-            </a:r>
-            <a:endParaRPr lang="de-DE" dirty="0"/>
+            <a:endParaRPr lang="de-DE"/>
           </a:p>
         </p:txBody>
       </p:sp>
@@ -6553,7 +6499,7 @@
           <p:cNvPr id="3" name="Datumsplatzhalter 2">
             <a:extLst>
               <a:ext uri="{FF2B5EF4-FFF2-40B4-BE49-F238E27FC236}">
-                <a16:creationId xmlns:a16="http://schemas.microsoft.com/office/drawing/2014/main" id="{429B8ED7-A119-2F1B-0633-832522A0AA64}"/>
+                <a16:creationId xmlns:a16="http://schemas.microsoft.com/office/drawing/2014/main" id="{94B0C656-70FD-AA07-72E4-BBD9C526AB6D}"/>
               </a:ext>
             </a:extLst>
           </p:cNvPr>
@@ -6584,7 +6530,7 @@
           <p:cNvPr id="4" name="Fußzeilenplatzhalter 3">
             <a:extLst>
               <a:ext uri="{FF2B5EF4-FFF2-40B4-BE49-F238E27FC236}">
-                <a16:creationId xmlns:a16="http://schemas.microsoft.com/office/drawing/2014/main" id="{03F614AA-2248-E8FE-3903-B79134DC45B7}"/>
+                <a16:creationId xmlns:a16="http://schemas.microsoft.com/office/drawing/2014/main" id="{A521C6A8-C082-65AF-964D-4C2E06125A1A}"/>
               </a:ext>
             </a:extLst>
           </p:cNvPr>
@@ -6614,7 +6560,7 @@
           <p:cNvPr id="5" name="Foliennummernplatzhalter 4">
             <a:extLst>
               <a:ext uri="{FF2B5EF4-FFF2-40B4-BE49-F238E27FC236}">
-                <a16:creationId xmlns:a16="http://schemas.microsoft.com/office/drawing/2014/main" id="{3F3C5A7D-6D2F-6FC0-F905-28D143645F6D}"/>
+                <a16:creationId xmlns:a16="http://schemas.microsoft.com/office/drawing/2014/main" id="{CEB863D1-CE05-B620-450C-8BA7FD2D6B0B}"/>
               </a:ext>
             </a:extLst>
           </p:cNvPr>
@@ -6645,7 +6591,7 @@
           <p:cNvPr id="6" name="Grafik 5">
             <a:extLst>
               <a:ext uri="{FF2B5EF4-FFF2-40B4-BE49-F238E27FC236}">
-                <a16:creationId xmlns:a16="http://schemas.microsoft.com/office/drawing/2014/main" id="{E24CBB40-4014-A892-49E4-4DF3C5C465FE}"/>
+                <a16:creationId xmlns:a16="http://schemas.microsoft.com/office/drawing/2014/main" id="{96250E5D-910F-F1EF-E8B9-7A4A7490F2E4}"/>
               </a:ext>
             </a:extLst>
           </p:cNvPr>
@@ -6662,8 +6608,8 @@
         </p:blipFill>
         <p:spPr>
           <a:xfrm>
-            <a:off x="942417" y="1339935"/>
-            <a:ext cx="7522417" cy="3789277"/>
+            <a:off x="19034" y="165100"/>
+            <a:ext cx="12141805" cy="5307014"/>
           </a:xfrm>
           <a:prstGeom prst="rect">
             <a:avLst/>
@@ -6673,7 +6619,7 @@
     </p:spTree>
     <p:extLst>
       <p:ext uri="{BB962C8B-B14F-4D97-AF65-F5344CB8AC3E}">
-        <p14:creationId xmlns:p14="http://schemas.microsoft.com/office/powerpoint/2010/main" val="242642976"/>
+        <p14:creationId xmlns:p14="http://schemas.microsoft.com/office/powerpoint/2010/main" val="194294411"/>
       </p:ext>
     </p:extLst>
   </p:cSld>
